--- a/VOIS_Project_PPT.pptx
+++ b/VOIS_Project_PPT.pptx
@@ -10997,45 +10997,30 @@
           </a:p>
         </p:txBody>
       </p:sp>
-      <p:sp>
-        <p:nvSpPr>
-          <p:cNvPr id="33" name="TextBox 32"/>
-          <p:cNvSpPr txBox="1"/>
+      <p:pic>
+        <p:nvPicPr>
+          <p:cNvPr id="33" name="Picture 32" descr="12_correlation_heatmap.png"/>
+          <p:cNvPicPr>
+            <a:picLocks noChangeAspect="1"/>
+          </p:cNvPicPr>
           <p:nvPr/>
-        </p:nvSpPr>
+        </p:nvPicPr>
+        <p:blipFill>
+          <a:blip r:embed="rId3"/>
+          <a:stretch>
+            <a:fillRect/>
+          </a:stretch>
+        </p:blipFill>
         <p:spPr>
           <a:xfrm>
-            <a:off x="4754880" y="1097280"/>
-            <a:ext cx="4114800" cy="3200400"/>
+            <a:off x="6035040" y="1005840"/>
+            <a:ext cx="5303520" cy="4896798"/>
           </a:xfrm>
           <a:prstGeom prst="rect">
             <a:avLst/>
           </a:prstGeom>
-          <a:noFill/>
         </p:spPr>
-        <p:txBody>
-          <a:bodyPr wrap="square">
-            <a:spAutoFit/>
-          </a:bodyPr>
-          <a:lstStyle/>
-          <a:p>
-            <a:pPr algn="ctr">
-              <a:defRPr sz="1100" b="0">
-                <a:solidFill>
-                  <a:srgbClr val="999999"/>
-                </a:solidFill>
-              </a:defRPr>
-            </a:pPr>
-            <a:r>
-              <a:t>[INSERT CHART: Correlation Heatmap]</a:t>
-            </a:r>
-            <a:br/>
-            <a:r>
-              <a:t>(charts/12_correlation_heatmap.png)</a:t>
-            </a:r>
-          </a:p>
-        </p:txBody>
-      </p:sp>
+      </p:pic>
     </p:spTree>
     <p:extLst>
       <p:ext uri="{BB962C8B-B14F-4D97-AF65-F5344CB8AC3E}">
@@ -15659,84 +15644,54 @@
           </a:p>
         </p:txBody>
       </p:sp>
-      <p:sp>
-        <p:nvSpPr>
-          <p:cNvPr id="33" name="TextBox 32"/>
-          <p:cNvSpPr txBox="1"/>
+      <p:pic>
+        <p:nvPicPr>
+          <p:cNvPr id="33" name="Picture 32" descr="01_avg_yield_by_season.png"/>
+          <p:cNvPicPr>
+            <a:picLocks noChangeAspect="1"/>
+          </p:cNvPicPr>
           <p:nvPr/>
-        </p:nvSpPr>
+        </p:nvPicPr>
+        <p:blipFill>
+          <a:blip r:embed="rId3"/>
+          <a:stretch>
+            <a:fillRect/>
+          </a:stretch>
+        </p:blipFill>
         <p:spPr>
           <a:xfrm>
-            <a:off x="274320" y="2926080"/>
-            <a:ext cx="4114800" cy="1828800"/>
+            <a:off x="731520" y="2743200"/>
+            <a:ext cx="5029200" cy="3104761"/>
           </a:xfrm>
           <a:prstGeom prst="rect">
             <a:avLst/>
           </a:prstGeom>
-          <a:noFill/>
         </p:spPr>
-        <p:txBody>
-          <a:bodyPr wrap="square">
-            <a:spAutoFit/>
-          </a:bodyPr>
-          <a:lstStyle/>
-          <a:p>
-            <a:pPr algn="ctr">
-              <a:defRPr sz="1100" b="0">
-                <a:solidFill>
-                  <a:srgbClr val="999999"/>
-                </a:solidFill>
-              </a:defRPr>
-            </a:pPr>
-            <a:r>
-              <a:t>[INSERT CHART: Average Yield by Season]</a:t>
-            </a:r>
-            <a:br/>
-            <a:r>
-              <a:t>(charts/01_avg_yield_by_season.png)</a:t>
-            </a:r>
-          </a:p>
-        </p:txBody>
-      </p:sp>
-      <p:sp>
-        <p:nvSpPr>
-          <p:cNvPr id="34" name="TextBox 33"/>
-          <p:cNvSpPr txBox="1"/>
+      </p:pic>
+      <p:pic>
+        <p:nvPicPr>
+          <p:cNvPr id="34" name="Picture 33" descr="02_avg_profit_by_season.png"/>
+          <p:cNvPicPr>
+            <a:picLocks noChangeAspect="1"/>
+          </p:cNvPicPr>
           <p:nvPr/>
-        </p:nvSpPr>
+        </p:nvPicPr>
+        <p:blipFill>
+          <a:blip r:embed="rId4"/>
+          <a:stretch>
+            <a:fillRect/>
+          </a:stretch>
+        </p:blipFill>
         <p:spPr>
           <a:xfrm>
-            <a:off x="4754880" y="2926080"/>
-            <a:ext cx="4114800" cy="1828800"/>
+            <a:off x="6217920" y="2743200"/>
+            <a:ext cx="5029200" cy="3099490"/>
           </a:xfrm>
           <a:prstGeom prst="rect">
             <a:avLst/>
           </a:prstGeom>
-          <a:noFill/>
         </p:spPr>
-        <p:txBody>
-          <a:bodyPr wrap="square">
-            <a:spAutoFit/>
-          </a:bodyPr>
-          <a:lstStyle/>
-          <a:p>
-            <a:pPr algn="ctr">
-              <a:defRPr sz="1100" b="0">
-                <a:solidFill>
-                  <a:srgbClr val="999999"/>
-                </a:solidFill>
-              </a:defRPr>
-            </a:pPr>
-            <a:r>
-              <a:t>[INSERT CHART: Average Profit by Season]</a:t>
-            </a:r>
-            <a:br/>
-            <a:r>
-              <a:t>(charts/02_avg_profit_by_season.png)</a:t>
-            </a:r>
-          </a:p>
-        </p:txBody>
-      </p:sp>
+      </p:pic>
     </p:spTree>
     <p:extLst>
       <p:ext uri="{BB962C8B-B14F-4D97-AF65-F5344CB8AC3E}">
@@ -16323,84 +16278,54 @@
           </a:p>
         </p:txBody>
       </p:sp>
-      <p:sp>
-        <p:nvSpPr>
-          <p:cNvPr id="33" name="TextBox 32"/>
-          <p:cNvSpPr txBox="1"/>
+      <p:pic>
+        <p:nvPicPr>
+          <p:cNvPr id="33" name="Picture 32" descr="03_total_production_by_season.png"/>
+          <p:cNvPicPr>
+            <a:picLocks noChangeAspect="1"/>
+          </p:cNvPicPr>
           <p:nvPr/>
-        </p:nvSpPr>
+        </p:nvPicPr>
+        <p:blipFill>
+          <a:blip r:embed="rId3"/>
+          <a:stretch>
+            <a:fillRect/>
+          </a:stretch>
+        </p:blipFill>
         <p:spPr>
           <a:xfrm>
-            <a:off x="274320" y="2560320"/>
-            <a:ext cx="4114800" cy="2286000"/>
+            <a:off x="731520" y="2468880"/>
+            <a:ext cx="5029200" cy="3099490"/>
           </a:xfrm>
           <a:prstGeom prst="rect">
             <a:avLst/>
           </a:prstGeom>
-          <a:noFill/>
         </p:spPr>
-        <p:txBody>
-          <a:bodyPr wrap="square">
-            <a:spAutoFit/>
-          </a:bodyPr>
-          <a:lstStyle/>
-          <a:p>
-            <a:pPr algn="ctr">
-              <a:defRPr sz="1100" b="0">
-                <a:solidFill>
-                  <a:srgbClr val="999999"/>
-                </a:solidFill>
-              </a:defRPr>
-            </a:pPr>
-            <a:r>
-              <a:t>[INSERT CHART: Total Production by Season]</a:t>
-            </a:r>
-            <a:br/>
-            <a:r>
-              <a:t>(charts/03_total_production_by_season.png)</a:t>
-            </a:r>
-          </a:p>
-        </p:txBody>
-      </p:sp>
-      <p:sp>
-        <p:nvSpPr>
-          <p:cNvPr id="34" name="TextBox 33"/>
-          <p:cNvSpPr txBox="1"/>
+      </p:pic>
+      <p:pic>
+        <p:nvPicPr>
+          <p:cNvPr id="34" name="Picture 33" descr="09_crop_wise_avg_yield.png"/>
+          <p:cNvPicPr>
+            <a:picLocks noChangeAspect="1"/>
+          </p:cNvPicPr>
           <p:nvPr/>
-        </p:nvSpPr>
+        </p:nvPicPr>
+        <p:blipFill>
+          <a:blip r:embed="rId4"/>
+          <a:stretch>
+            <a:fillRect/>
+          </a:stretch>
+        </p:blipFill>
         <p:spPr>
           <a:xfrm>
-            <a:off x="4754880" y="2560320"/>
-            <a:ext cx="4114800" cy="2286000"/>
+            <a:off x="6217920" y="2468880"/>
+            <a:ext cx="5029200" cy="2992921"/>
           </a:xfrm>
           <a:prstGeom prst="rect">
             <a:avLst/>
           </a:prstGeom>
-          <a:noFill/>
         </p:spPr>
-        <p:txBody>
-          <a:bodyPr wrap="square">
-            <a:spAutoFit/>
-          </a:bodyPr>
-          <a:lstStyle/>
-          <a:p>
-            <a:pPr algn="ctr">
-              <a:defRPr sz="1100" b="0">
-                <a:solidFill>
-                  <a:srgbClr val="999999"/>
-                </a:solidFill>
-              </a:defRPr>
-            </a:pPr>
-            <a:r>
-              <a:t>[INSERT CHART: Crop-wise Average Yield]</a:t>
-            </a:r>
-            <a:br/>
-            <a:r>
-              <a:t>(charts/09_crop_wise_avg_yield.png)</a:t>
-            </a:r>
-          </a:p>
-        </p:txBody>
-      </p:sp>
+      </p:pic>
     </p:spTree>
     <p:extLst>
       <p:ext uri="{BB962C8B-B14F-4D97-AF65-F5344CB8AC3E}">
@@ -16988,84 +16913,54 @@
           </a:p>
         </p:txBody>
       </p:sp>
-      <p:sp>
-        <p:nvSpPr>
-          <p:cNvPr id="33" name="TextBox 32"/>
-          <p:cNvSpPr txBox="1"/>
+      <p:pic>
+        <p:nvPicPr>
+          <p:cNvPr id="33" name="Picture 32" descr="04_rainfall_vs_yield.png"/>
+          <p:cNvPicPr>
+            <a:picLocks noChangeAspect="1"/>
+          </p:cNvPicPr>
           <p:nvPr/>
-        </p:nvSpPr>
+        </p:nvPicPr>
+        <p:blipFill>
+          <a:blip r:embed="rId3"/>
+          <a:stretch>
+            <a:fillRect/>
+          </a:stretch>
+        </p:blipFill>
         <p:spPr>
           <a:xfrm>
-            <a:off x="274320" y="2560320"/>
-            <a:ext cx="4114800" cy="2286000"/>
+            <a:off x="731520" y="2468880"/>
+            <a:ext cx="5029200" cy="2982789"/>
           </a:xfrm>
           <a:prstGeom prst="rect">
             <a:avLst/>
           </a:prstGeom>
-          <a:noFill/>
         </p:spPr>
-        <p:txBody>
-          <a:bodyPr wrap="square">
-            <a:spAutoFit/>
-          </a:bodyPr>
-          <a:lstStyle/>
-          <a:p>
-            <a:pPr algn="ctr">
-              <a:defRPr sz="1100" b="0">
-                <a:solidFill>
-                  <a:srgbClr val="999999"/>
-                </a:solidFill>
-              </a:defRPr>
-            </a:pPr>
-            <a:r>
-              <a:t>[INSERT CHART: Rainfall vs Yield]</a:t>
-            </a:r>
-            <a:br/>
-            <a:r>
-              <a:t>(charts/04_rainfall_vs_yield.png)</a:t>
-            </a:r>
-          </a:p>
-        </p:txBody>
-      </p:sp>
-      <p:sp>
-        <p:nvSpPr>
-          <p:cNvPr id="34" name="TextBox 33"/>
-          <p:cNvSpPr txBox="1"/>
+      </p:pic>
+      <p:pic>
+        <p:nvPicPr>
+          <p:cNvPr id="34" name="Picture 33" descr="08_disease_risk_by_season.png"/>
+          <p:cNvPicPr>
+            <a:picLocks noChangeAspect="1"/>
+          </p:cNvPicPr>
           <p:nvPr/>
-        </p:nvSpPr>
+        </p:nvPicPr>
+        <p:blipFill>
+          <a:blip r:embed="rId4"/>
+          <a:stretch>
+            <a:fillRect/>
+          </a:stretch>
+        </p:blipFill>
         <p:spPr>
           <a:xfrm>
-            <a:off x="4754880" y="2560320"/>
-            <a:ext cx="4114800" cy="2286000"/>
+            <a:off x="6217920" y="2468880"/>
+            <a:ext cx="5029200" cy="3102123"/>
           </a:xfrm>
           <a:prstGeom prst="rect">
             <a:avLst/>
           </a:prstGeom>
-          <a:noFill/>
         </p:spPr>
-        <p:txBody>
-          <a:bodyPr wrap="square">
-            <a:spAutoFit/>
-          </a:bodyPr>
-          <a:lstStyle/>
-          <a:p>
-            <a:pPr algn="ctr">
-              <a:defRPr sz="1100" b="0">
-                <a:solidFill>
-                  <a:srgbClr val="999999"/>
-                </a:solidFill>
-              </a:defRPr>
-            </a:pPr>
-            <a:r>
-              <a:t>[INSERT CHART: Disease/Pest Risk by Season]</a:t>
-            </a:r>
-            <a:br/>
-            <a:r>
-              <a:t>(charts/08_disease_risk_by_season.png)</a:t>
-            </a:r>
-          </a:p>
-        </p:txBody>
-      </p:sp>
+      </p:pic>
     </p:spTree>
     <p:extLst>
       <p:ext uri="{BB962C8B-B14F-4D97-AF65-F5344CB8AC3E}">
@@ -17653,84 +17548,54 @@
           </a:p>
         </p:txBody>
       </p:sp>
-      <p:sp>
-        <p:nvSpPr>
-          <p:cNvPr id="33" name="TextBox 32"/>
-          <p:cNvSpPr txBox="1"/>
+      <p:pic>
+        <p:nvPicPr>
+          <p:cNvPr id="33" name="Picture 32" descr="10_irrigation_vs_yield.png"/>
+          <p:cNvPicPr>
+            <a:picLocks noChangeAspect="1"/>
+          </p:cNvPicPr>
           <p:nvPr/>
-        </p:nvSpPr>
+        </p:nvPicPr>
+        <p:blipFill>
+          <a:blip r:embed="rId3"/>
+          <a:stretch>
+            <a:fillRect/>
+          </a:stretch>
+        </p:blipFill>
         <p:spPr>
           <a:xfrm>
-            <a:off x="274320" y="2560320"/>
-            <a:ext cx="4114800" cy="2286000"/>
+            <a:off x="731520" y="2468880"/>
+            <a:ext cx="5029200" cy="3104761"/>
           </a:xfrm>
           <a:prstGeom prst="rect">
             <a:avLst/>
           </a:prstGeom>
-          <a:noFill/>
         </p:spPr>
-        <p:txBody>
-          <a:bodyPr wrap="square">
-            <a:spAutoFit/>
-          </a:bodyPr>
-          <a:lstStyle/>
-          <a:p>
-            <a:pPr algn="ctr">
-              <a:defRPr sz="1100" b="0">
-                <a:solidFill>
-                  <a:srgbClr val="999999"/>
-                </a:solidFill>
-              </a:defRPr>
-            </a:pPr>
-            <a:r>
-              <a:t>[INSERT CHART: Irrigation Method vs Yield]</a:t>
-            </a:r>
-            <a:br/>
-            <a:r>
-              <a:t>(charts/10_irrigation_vs_yield.png)</a:t>
-            </a:r>
-          </a:p>
-        </p:txBody>
-      </p:sp>
-      <p:sp>
-        <p:nvSpPr>
-          <p:cNvPr id="34" name="TextBox 33"/>
-          <p:cNvSpPr txBox="1"/>
+      </p:pic>
+      <p:pic>
+        <p:nvPicPr>
+          <p:cNvPr id="34" name="Picture 33" descr="11_irrigation_vs_water_efficiency.png"/>
+          <p:cNvPicPr>
+            <a:picLocks noChangeAspect="1"/>
+          </p:cNvPicPr>
           <p:nvPr/>
-        </p:nvSpPr>
+        </p:nvPicPr>
+        <p:blipFill>
+          <a:blip r:embed="rId4"/>
+          <a:stretch>
+            <a:fillRect/>
+          </a:stretch>
+        </p:blipFill>
         <p:spPr>
           <a:xfrm>
-            <a:off x="4754880" y="2560320"/>
-            <a:ext cx="4114800" cy="2286000"/>
+            <a:off x="6217920" y="2468880"/>
+            <a:ext cx="5029200" cy="3104761"/>
           </a:xfrm>
           <a:prstGeom prst="rect">
             <a:avLst/>
           </a:prstGeom>
-          <a:noFill/>
         </p:spPr>
-        <p:txBody>
-          <a:bodyPr wrap="square">
-            <a:spAutoFit/>
-          </a:bodyPr>
-          <a:lstStyle/>
-          <a:p>
-            <a:pPr algn="ctr">
-              <a:defRPr sz="1100" b="0">
-                <a:solidFill>
-                  <a:srgbClr val="999999"/>
-                </a:solidFill>
-              </a:defRPr>
-            </a:pPr>
-            <a:r>
-              <a:t>[INSERT CHART: Irrigation vs Water Efficiency]</a:t>
-            </a:r>
-            <a:br/>
-            <a:r>
-              <a:t>(charts/11_irrigation_vs_water_efficiency.png)</a:t>
-            </a:r>
-          </a:p>
-        </p:txBody>
-      </p:sp>
+      </p:pic>
     </p:spTree>
     <p:extLst>
       <p:ext uri="{BB962C8B-B14F-4D97-AF65-F5344CB8AC3E}">

--- a/VOIS_Project_PPT.pptx
+++ b/VOIS_Project_PPT.pptx
@@ -10155,8 +10155,8 @@
         </p:nvSpPr>
         <p:spPr>
           <a:xfrm>
-            <a:off x="914400" y="2651760"/>
-            <a:ext cx="7315200" cy="457200"/>
+            <a:off x="914400" y="2423160"/>
+            <a:ext cx="7315200" cy="411480"/>
           </a:xfrm>
           <a:prstGeom prst="rect">
             <a:avLst/>
@@ -10190,8 +10190,8 @@
         </p:nvSpPr>
         <p:spPr>
           <a:xfrm>
-            <a:off x="914400" y="3200400"/>
-            <a:ext cx="7315200" cy="457200"/>
+            <a:off x="914400" y="2926080"/>
+            <a:ext cx="7315200" cy="411480"/>
           </a:xfrm>
           <a:prstGeom prst="rect">
             <a:avLst/>
@@ -10248,6 +10248,41 @@
             </a:pPr>
             <a:r>
               <a:t>Data Analytics Internship — Seasonal Agriculture Performance Analysis</a:t>
+            </a:r>
+          </a:p>
+        </p:txBody>
+      </p:sp>
+      <p:sp>
+        <p:nvSpPr>
+          <p:cNvPr id="44" name="TextBox 43"/>
+          <p:cNvSpPr txBox="1"/>
+          <p:nvPr/>
+        </p:nvSpPr>
+        <p:spPr>
+          <a:xfrm>
+            <a:off x="914400" y="3429000"/>
+            <a:ext cx="7315200" cy="411480"/>
+          </a:xfrm>
+          <a:prstGeom prst="rect">
+            <a:avLst/>
+          </a:prstGeom>
+          <a:noFill/>
+        </p:spPr>
+        <p:txBody>
+          <a:bodyPr wrap="square">
+            <a:spAutoFit/>
+          </a:bodyPr>
+          <a:lstStyle/>
+          <a:p>
+            <a:pPr>
+              <a:defRPr sz="1600" b="1">
+                <a:solidFill>
+                  <a:srgbClr val="FFFFFF"/>
+                </a:solidFill>
+              </a:defRPr>
+            </a:pPr>
+            <a:r>
+              <a:t>AICTE STU ID: STU6a252b77248381780820855</a:t>
             </a:r>
           </a:p>
         </p:txBody>
@@ -12154,31 +12189,63 @@
           </a:bodyPr>
           <a:lstStyle/>
           <a:p>
-            <a:pPr algn="ctr">
-              <a:defRPr sz="1200" b="0">
+            <a:pPr>
+              <a:defRPr sz="1400">
                 <a:solidFill>
-                  <a:srgbClr val="777777"/>
+                  <a:srgbClr val="505050"/>
                 </a:solidFill>
               </a:defRPr>
             </a:pPr>
             <a:r>
-              <a:t>Repository should contain:</a:t>
-            </a:r>
-            <a:br/>
-            <a:r>
-              <a:t>• Jupyter Notebook</a:t>
-            </a:r>
-            <a:br/>
-            <a:r>
-              <a:t>• Dataset (CSV)</a:t>
-            </a:r>
-            <a:br/>
-            <a:r>
-              <a:t>• Charts folder</a:t>
-            </a:r>
-            <a:br/>
-            <a:r>
-              <a:t>• README.md</a:t>
+              <a:t>Repository Contents:</a:t>
+            </a:r>
+          </a:p>
+          <a:p>
+            <a:pPr>
+              <a:defRPr sz="1400">
+                <a:solidFill>
+                  <a:srgbClr val="505050"/>
+                </a:solidFill>
+              </a:defRPr>
+            </a:pPr>
+            <a:r>
+              <a:t>• Jupyter Notebook (.ipynb) with complete analysis</a:t>
+            </a:r>
+          </a:p>
+          <a:p>
+            <a:pPr>
+              <a:defRPr sz="1400">
+                <a:solidFill>
+                  <a:srgbClr val="505050"/>
+                </a:solidFill>
+              </a:defRPr>
+            </a:pPr>
+            <a:r>
+              <a:t>• Dataset (CSV) — 4,000 records × 28 features</a:t>
+            </a:r>
+          </a:p>
+          <a:p>
+            <a:pPr>
+              <a:defRPr sz="1400">
+                <a:solidFill>
+                  <a:srgbClr val="505050"/>
+                </a:solidFill>
+              </a:defRPr>
+            </a:pPr>
+            <a:r>
+              <a:t>• 12 High-Resolution Visualizations (charts/)</a:t>
+            </a:r>
+          </a:p>
+          <a:p>
+            <a:pPr>
+              <a:defRPr sz="1400">
+                <a:solidFill>
+                  <a:srgbClr val="505050"/>
+                </a:solidFill>
+              </a:defRPr>
+            </a:pPr>
+            <a:r>
+              <a:t>• Complete Documentation &amp; Verification Reports</a:t>
             </a:r>
           </a:p>
         </p:txBody>
@@ -12600,15 +12667,8 @@
           <a:bodyPr rtlCol="0" anchor="ctr" wrap="square" lIns="457200"/>
           <a:lstStyle/>
           <a:p>
-            <a:pPr algn="l">
-              <a:defRPr sz="2400" b="1">
-                <a:solidFill>
-                  <a:srgbClr val="FFFFFF"/>
-                </a:solidFill>
-              </a:defRPr>
-            </a:pPr>
-            <a:r>
-              <a:t>  VOIS Course Completion Certificate</a:t>
+            <a:r>
+              <a:t>  VOIS Course Completion Certificate — Data Visualization</a:t>
             </a:r>
           </a:p>
         </p:txBody>
@@ -12621,8 +12681,8 @@
         </p:nvSpPr>
         <p:spPr>
           <a:xfrm>
-            <a:off x="914400" y="1188720"/>
-            <a:ext cx="7315200" cy="457200"/>
+            <a:off x="914400" y="822960"/>
+            <a:ext cx="10360152" cy="365760"/>
           </a:xfrm>
           <a:prstGeom prst="rect">
             <a:avLst/>
@@ -12635,54 +12695,43 @@
           </a:bodyPr>
           <a:lstStyle/>
           <a:p>
-            <a:pPr algn="ctr">
-              <a:defRPr sz="1400" b="0">
+            <a:pPr>
+              <a:defRPr sz="1400" b="1">
                 <a:solidFill>
-                  <a:srgbClr val="555555"/>
+                  <a:srgbClr val="323232"/>
                 </a:solidFill>
               </a:defRPr>
             </a:pPr>
             <a:r>
-              <a:t>Course: Data Analytics</a:t>
+              <a:t>Course: Data Visualization  |  Certificate ID: VFLMS26_163451  |  Issued: September 6, 2026</a:t>
             </a:r>
           </a:p>
         </p:txBody>
       </p:sp>
-      <p:sp>
-        <p:nvSpPr>
-          <p:cNvPr id="26" name="TextBox 25"/>
-          <p:cNvSpPr txBox="1"/>
+      <p:pic>
+        <p:nvPicPr>
+          <p:cNvPr id="26" name="Picture 25" descr="certificate.png"/>
+          <p:cNvPicPr>
+            <a:picLocks noChangeAspect="1"/>
+          </p:cNvPicPr>
           <p:nvPr/>
-        </p:nvSpPr>
+        </p:nvPicPr>
+        <p:blipFill>
+          <a:blip r:embed="rId3"/>
+          <a:stretch>
+            <a:fillRect/>
+          </a:stretch>
+        </p:blipFill>
         <p:spPr>
           <a:xfrm>
-            <a:off x="914400" y="2011680"/>
-            <a:ext cx="7315200" cy="2743200"/>
+            <a:off x="2475845" y="1280160"/>
+            <a:ext cx="7240308" cy="5120640"/>
           </a:xfrm>
           <a:prstGeom prst="rect">
             <a:avLst/>
           </a:prstGeom>
-          <a:noFill/>
         </p:spPr>
-        <p:txBody>
-          <a:bodyPr wrap="square">
-            <a:spAutoFit/>
-          </a:bodyPr>
-          <a:lstStyle/>
-          <a:p>
-            <a:pPr algn="ctr">
-              <a:defRPr sz="1600" b="1">
-                <a:solidFill>
-                  <a:srgbClr val="999999"/>
-                </a:solidFill>
-              </a:defRPr>
-            </a:pPr>
-            <a:r>
-              <a:t>[INSERT YOUR VOIS COURSE COMPLETION CERTIFICATE SCREENSHOT HERE]</a:t>
-            </a:r>
-          </a:p>
-        </p:txBody>
-      </p:sp>
+      </p:pic>
     </p:spTree>
     <p:extLst>
       <p:ext uri="{BB962C8B-B14F-4D97-AF65-F5344CB8AC3E}">

--- a/VOIS_Project_PPT.pptx
+++ b/VOIS_Project_PPT.pptx
@@ -10032,14 +10032,14 @@
         </p:nvSpPr>
         <p:spPr>
           <a:xfrm>
-            <a:off x="0" y="2286000"/>
-            <a:ext cx="12192000" cy="2011680"/>
+            <a:off x="0" y="0"/>
+            <a:ext cx="12191999" cy="137160"/>
           </a:xfrm>
           <a:prstGeom prst="rect">
             <a:avLst/>
           </a:prstGeom>
           <a:solidFill>
-            <a:srgbClr val="E63946"/>
+            <a:srgbClr val="1B365D"/>
           </a:solidFill>
           <a:ln>
             <a:noFill/>
@@ -10060,16 +10060,10 @@
           </a:fontRef>
         </p:style>
         <p:txBody>
-          <a:bodyPr rtlCol="0" anchor="ctr" wrap="square" lIns="457200"/>
+          <a:bodyPr rtlCol="0" anchor="ctr"/>
           <a:lstStyle/>
           <a:p>
-            <a:pPr algn="l">
-              <a:defRPr sz="2400" b="1">
-                <a:solidFill>
-                  <a:srgbClr val="FFFFFF"/>
-                </a:solidFill>
-              </a:defRPr>
-            </a:pPr>
+            <a:pPr algn="ctr"/>
           </a:p>
         </p:txBody>
       </p:sp>
@@ -10081,8 +10075,8 @@
         </p:nvSpPr>
         <p:spPr>
           <a:xfrm>
-            <a:off x="457200" y="731520"/>
-            <a:ext cx="8229600" cy="914400"/>
+            <a:off x="914400" y="777240"/>
+            <a:ext cx="10362895" cy="1645920"/>
           </a:xfrm>
           <a:prstGeom prst="rect">
             <a:avLst/>
@@ -10095,54 +10089,172 @@
           </a:bodyPr>
           <a:lstStyle/>
           <a:p>
-            <a:pPr algn="ctr">
-              <a:defRPr sz="2800" b="1">
-                <a:solidFill>
-                  <a:srgbClr val="E63946"/>
-                </a:solidFill>
+            <a:pPr>
+              <a:defRPr sz="3200" b="1">
+                <a:solidFill>
+                  <a:srgbClr val="1B365D"/>
+                </a:solidFill>
+                <a:latin typeface="Segoe UI"/>
               </a:defRPr>
             </a:pPr>
             <a:r>
               <a:t>Seasonal Agriculture Performance Analysis</a:t>
+            </a:r>
+          </a:p>
+          <a:p>
+            <a:pPr>
+              <a:spcBef>
+                <a:spcPts val="800"/>
+              </a:spcBef>
+              <a:defRPr sz="1600">
+                <a:solidFill>
+                  <a:srgbClr val="475569"/>
+                </a:solidFill>
+                <a:latin typeface="Segoe UI"/>
+              </a:defRPr>
+            </a:pPr>
+            <a:r>
+              <a:t>A Data-Driven Study of 4,000 Farm Records Across Kharif, Rabi, and Zaid Seasons</a:t>
             </a:r>
           </a:p>
         </p:txBody>
       </p:sp>
       <p:sp>
         <p:nvSpPr>
-          <p:cNvPr id="40" name="TextBox 39"/>
-          <p:cNvSpPr txBox="1"/>
+          <p:cNvPr id="40" name="Rounded Rectangle 39"/>
+          <p:cNvSpPr/>
           <p:nvPr/>
         </p:nvSpPr>
         <p:spPr>
           <a:xfrm>
-            <a:off x="457200" y="1645920"/>
-            <a:ext cx="8229600" cy="731520"/>
+            <a:off x="914400" y="2560320"/>
+            <a:ext cx="10362895" cy="2926080"/>
           </a:xfrm>
-          <a:prstGeom prst="rect">
+          <a:prstGeom prst="roundRect">
             <a:avLst/>
           </a:prstGeom>
-          <a:noFill/>
+          <a:solidFill>
+            <a:srgbClr val="F8FAFC"/>
+          </a:solidFill>
+          <a:ln w="19050">
+            <a:solidFill>
+              <a:srgbClr val="CBD5E1"/>
+            </a:solidFill>
+          </a:ln>
         </p:spPr>
+        <p:style>
+          <a:lnRef idx="1">
+            <a:schemeClr val="accent1"/>
+          </a:lnRef>
+          <a:fillRef idx="3">
+            <a:schemeClr val="accent1"/>
+          </a:fillRef>
+          <a:effectRef idx="2">
+            <a:schemeClr val="accent1"/>
+          </a:effectRef>
+          <a:fontRef idx="minor">
+            <a:schemeClr val="lt1"/>
+          </a:fontRef>
+        </p:style>
         <p:txBody>
-          <a:bodyPr wrap="square">
-            <a:spAutoFit/>
-          </a:bodyPr>
+          <a:bodyPr rtlCol="0" anchor="ctr" wrap="square"/>
           <a:lstStyle/>
           <a:p>
             <a:pPr algn="ctr">
-              <a:defRPr sz="1400" b="0">
-                <a:solidFill>
-                  <a:srgbClr val="555555"/>
-                </a:solidFill>
+              <a:defRPr sz="1300" b="1">
+                <a:solidFill>
+                  <a:srgbClr val="1B365D"/>
+                </a:solidFill>
+                <a:latin typeface="Segoe UI"/>
               </a:defRPr>
             </a:pPr>
             <a:r>
-              <a:t>VOIS For Tech / AICTE Data Analytics Internship</a:t>
-            </a:r>
-            <a:br/>
-            <a:r>
-              <a:t>Major Project — Batch 2026-2027</a:t>
+              <a:t>VOIS FOR TECH / AICTE DATA ANALYTICS INTERNSHIP</a:t>
+            </a:r>
+          </a:p>
+          <a:p>
+            <a:pPr>
+              <a:spcAft>
+                <a:spcPts val="1400"/>
+              </a:spcAft>
+              <a:defRPr sz="1200">
+                <a:solidFill>
+                  <a:srgbClr val="475569"/>
+                </a:solidFill>
+                <a:latin typeface="Segoe UI"/>
+              </a:defRPr>
+            </a:pPr>
+            <a:r>
+              <a:t>Major Project Submission — August Batch 2026–2027</a:t>
+            </a:r>
+          </a:p>
+          <a:p>
+            <a:pPr>
+              <a:defRPr sz="1600">
+                <a:latin typeface="Segoe UI"/>
+              </a:defRPr>
+            </a:pPr>
+            <a:r>
+              <a:rPr b="1">
+                <a:solidFill>
+                  <a:srgbClr val="475569"/>
+                </a:solidFill>
+              </a:rPr>
+              <a:t>Student Name:  </a:t>
+            </a:r>
+            <a:r>
+              <a:rPr b="1">
+                <a:solidFill>
+                  <a:srgbClr val="1E293B"/>
+                </a:solidFill>
+              </a:rPr>
+              <a:t>Krishna Kumar</a:t>
+            </a:r>
+          </a:p>
+          <a:p>
+            <a:pPr>
+              <a:defRPr sz="1500">
+                <a:latin typeface="Segoe UI"/>
+              </a:defRPr>
+            </a:pPr>
+            <a:r>
+              <a:rPr b="1">
+                <a:solidFill>
+                  <a:srgbClr val="475569"/>
+                </a:solidFill>
+              </a:rPr>
+              <a:t>College Name:   </a:t>
+            </a:r>
+            <a:r>
+              <a:rPr>
+                <a:solidFill>
+                  <a:srgbClr val="1E293B"/>
+                </a:solidFill>
+              </a:rPr>
+              <a:t>Ambalika Institute of Management and Technology, Lucknow</a:t>
+            </a:r>
+          </a:p>
+          <a:p>
+            <a:pPr>
+              <a:defRPr sz="1500">
+                <a:latin typeface="Segoe UI"/>
+              </a:defRPr>
+            </a:pPr>
+            <a:r>
+              <a:rPr b="1">
+                <a:solidFill>
+                  <a:srgbClr val="475569"/>
+                </a:solidFill>
+              </a:rPr>
+              <a:t>AICTE STU ID:   </a:t>
+            </a:r>
+            <a:r>
+              <a:rPr b="1">
+                <a:solidFill>
+                  <a:srgbClr val="1B365D"/>
+                </a:solidFill>
+              </a:rPr>
+              <a:t>STU6a252b77248381780820855</a:t>
             </a:r>
           </a:p>
         </p:txBody>
@@ -10155,8 +10267,8 @@
         </p:nvSpPr>
         <p:spPr>
           <a:xfrm>
-            <a:off x="914400" y="2423160"/>
-            <a:ext cx="7315200" cy="411480"/>
+            <a:off x="914400" y="5760720"/>
+            <a:ext cx="10362895" cy="457200"/>
           </a:xfrm>
           <a:prstGeom prst="rect">
             <a:avLst/>
@@ -10164,125 +10276,21 @@
           <a:noFill/>
         </p:spPr>
         <p:txBody>
-          <a:bodyPr wrap="square">
+          <a:bodyPr wrap="none">
             <a:spAutoFit/>
           </a:bodyPr>
           <a:lstStyle/>
           <a:p>
-            <a:pPr algn="ctr">
-              <a:defRPr sz="2000" b="1">
-                <a:solidFill>
-                  <a:srgbClr val="FFFFFF"/>
-                </a:solidFill>
+            <a:pPr>
+              <a:defRPr sz="1100">
+                <a:solidFill>
+                  <a:srgbClr val="475569"/>
+                </a:solidFill>
+                <a:latin typeface="Segoe UI"/>
               </a:defRPr>
             </a:pPr>
             <a:r>
-              <a:t>Krishna Kumar</a:t>
-            </a:r>
-          </a:p>
-        </p:txBody>
-      </p:sp>
-      <p:sp>
-        <p:nvSpPr>
-          <p:cNvPr id="42" name="TextBox 41"/>
-          <p:cNvSpPr txBox="1"/>
-          <p:nvPr/>
-        </p:nvSpPr>
-        <p:spPr>
-          <a:xfrm>
-            <a:off x="914400" y="2926080"/>
-            <a:ext cx="7315200" cy="411480"/>
-          </a:xfrm>
-          <a:prstGeom prst="rect">
-            <a:avLst/>
-          </a:prstGeom>
-          <a:noFill/>
-        </p:spPr>
-        <p:txBody>
-          <a:bodyPr wrap="square">
-            <a:spAutoFit/>
-          </a:bodyPr>
-          <a:lstStyle/>
-          <a:p>
-            <a:pPr algn="ctr">
-              <a:defRPr sz="1600" b="0">
-                <a:solidFill>
-                  <a:srgbClr val="FFFFFF"/>
-                </a:solidFill>
-              </a:defRPr>
-            </a:pPr>
-            <a:r>
-              <a:t>Ambalika Institute of Management and Technology</a:t>
-            </a:r>
-          </a:p>
-        </p:txBody>
-      </p:sp>
-      <p:sp>
-        <p:nvSpPr>
-          <p:cNvPr id="43" name="TextBox 42"/>
-          <p:cNvSpPr txBox="1"/>
-          <p:nvPr/>
-        </p:nvSpPr>
-        <p:spPr>
-          <a:xfrm>
-            <a:off x="457200" y="4572000"/>
-            <a:ext cx="8229600" cy="365760"/>
-          </a:xfrm>
-          <a:prstGeom prst="rect">
-            <a:avLst/>
-          </a:prstGeom>
-          <a:noFill/>
-        </p:spPr>
-        <p:txBody>
-          <a:bodyPr wrap="square">
-            <a:spAutoFit/>
-          </a:bodyPr>
-          <a:lstStyle/>
-          <a:p>
-            <a:pPr algn="ctr">
-              <a:defRPr sz="1000" b="0">
-                <a:solidFill>
-                  <a:srgbClr val="999999"/>
-                </a:solidFill>
-              </a:defRPr>
-            </a:pPr>
-            <a:r>
-              <a:t>Data Analytics Internship — Seasonal Agriculture Performance Analysis</a:t>
-            </a:r>
-          </a:p>
-        </p:txBody>
-      </p:sp>
-      <p:sp>
-        <p:nvSpPr>
-          <p:cNvPr id="44" name="TextBox 43"/>
-          <p:cNvSpPr txBox="1"/>
-          <p:nvPr/>
-        </p:nvSpPr>
-        <p:spPr>
-          <a:xfrm>
-            <a:off x="914400" y="3429000"/>
-            <a:ext cx="7315200" cy="411480"/>
-          </a:xfrm>
-          <a:prstGeom prst="rect">
-            <a:avLst/>
-          </a:prstGeom>
-          <a:noFill/>
-        </p:spPr>
-        <p:txBody>
-          <a:bodyPr wrap="square">
-            <a:spAutoFit/>
-          </a:bodyPr>
-          <a:lstStyle/>
-          <a:p>
-            <a:pPr>
-              <a:defRPr sz="1600" b="1">
-                <a:solidFill>
-                  <a:srgbClr val="FFFFFF"/>
-                </a:solidFill>
-              </a:defRPr>
-            </a:pPr>
-            <a:r>
-              <a:t>AICTE STU ID: STU6a252b77248381780820855</a:t>
+              <a:t>Domain: Data Analytics  |  Platform: VOIS LMS / Edunet Foundation  |  Submission Date: September 2026</a:t>
             </a:r>
           </a:p>
         </p:txBody>
@@ -10889,16 +10897,18 @@
         <p:spPr>
           <a:xfrm>
             <a:off x="0" y="0"/>
-            <a:ext cx="12192000" cy="731520"/>
+            <a:ext cx="12191999" cy="731520"/>
           </a:xfrm>
           <a:prstGeom prst="rect">
             <a:avLst/>
           </a:prstGeom>
           <a:solidFill>
-            <a:srgbClr val="E63946"/>
+            <a:srgbClr val="1B365D"/>
           </a:solidFill>
           <a:ln>
-            <a:noFill/>
+            <a:solidFill>
+              <a:srgbClr val="1B365D"/>
+            </a:solidFill>
           </a:ln>
         </p:spPr>
         <p:style>
@@ -10916,125 +10926,240 @@
           </a:fontRef>
         </p:style>
         <p:txBody>
-          <a:bodyPr rtlCol="0" anchor="ctr" wrap="square" lIns="457200"/>
+          <a:bodyPr rtlCol="0" anchor="ctr" wrap="square"/>
           <a:lstStyle/>
           <a:p>
-            <a:pPr algn="l">
-              <a:defRPr sz="2400" b="1">
+            <a:pPr algn="ctr">
+              <a:defRPr sz="2200" b="1">
                 <a:solidFill>
                   <a:srgbClr val="FFFFFF"/>
                 </a:solidFill>
+                <a:latin typeface="Segoe UI"/>
               </a:defRPr>
             </a:pPr>
             <a:r>
-              <a:t>  Results — Correlations &amp; Key Findings</a:t>
+              <a:t>   Results — Correlation Matrix &amp; Synthesis of Findings</a:t>
             </a:r>
           </a:p>
         </p:txBody>
       </p:sp>
       <p:sp>
         <p:nvSpPr>
-          <p:cNvPr id="32" name="TextBox 31"/>
-          <p:cNvSpPr txBox="1"/>
+          <p:cNvPr id="32" name="Rounded Rectangle 31"/>
+          <p:cNvSpPr/>
           <p:nvPr/>
         </p:nvSpPr>
         <p:spPr>
           <a:xfrm>
-            <a:off x="365760" y="914400"/>
-            <a:ext cx="4114800" cy="3657600"/>
+            <a:off x="731520" y="960120"/>
+            <a:ext cx="5212080" cy="5303520"/>
           </a:xfrm>
-          <a:prstGeom prst="rect">
+          <a:prstGeom prst="roundRect">
             <a:avLst/>
           </a:prstGeom>
-          <a:noFill/>
+          <a:solidFill>
+            <a:srgbClr val="F8FAFC"/>
+          </a:solidFill>
+          <a:ln>
+            <a:solidFill>
+              <a:srgbClr val="CBD5E1"/>
+            </a:solidFill>
+          </a:ln>
         </p:spPr>
+        <p:style>
+          <a:lnRef idx="1">
+            <a:schemeClr val="accent1"/>
+          </a:lnRef>
+          <a:fillRef idx="3">
+            <a:schemeClr val="accent1"/>
+          </a:fillRef>
+          <a:effectRef idx="2">
+            <a:schemeClr val="accent1"/>
+          </a:effectRef>
+          <a:fontRef idx="minor">
+            <a:schemeClr val="lt1"/>
+          </a:fontRef>
+        </p:style>
         <p:txBody>
-          <a:bodyPr wrap="square">
-            <a:spAutoFit/>
-          </a:bodyPr>
+          <a:bodyPr rtlCol="0" anchor="ctr" wrap="square" lIns="228600" rIns="228600" tIns="182880"/>
           <a:lstStyle/>
+          <a:p>
+            <a:pPr algn="ctr">
+              <a:spcAft>
+                <a:spcPts val="800"/>
+              </a:spcAft>
+              <a:defRPr sz="1700" b="1">
+                <a:solidFill>
+                  <a:srgbClr val="1B365D"/>
+                </a:solidFill>
+                <a:latin typeface="Segoe UI"/>
+              </a:defRPr>
+            </a:pPr>
+            <a:r>
+              <a:t>Key Empirical Findings</a:t>
+            </a:r>
+          </a:p>
           <a:p>
             <a:pPr>
               <a:spcAft>
-                <a:spcPts val="400"/>
+                <a:spcPts val="600"/>
               </a:spcAft>
-              <a:defRPr sz="1100"/>
+              <a:defRPr sz="1150">
+                <a:latin typeface="Segoe UI"/>
+              </a:defRPr>
             </a:pPr>
             <a:r>
-              <a:t>Key Findings:</a:t>
+              <a:rPr b="1">
+                <a:solidFill>
+                  <a:srgbClr val="1E293B"/>
+                </a:solidFill>
+              </a:rPr>
+              <a:t>1. Kharif Outperformance: </a:t>
+            </a:r>
+            <a:r>
+              <a:rPr>
+                <a:solidFill>
+                  <a:srgbClr val="1E293B"/>
+                </a:solidFill>
+              </a:rPr>
+              <a:t>Kharif achieves peak average yield (5.63 t/ha) and highest profit (₹1,78,915), but experiences highest pest risk (54.5%).</a:t>
             </a:r>
           </a:p>
           <a:p>
             <a:pPr>
               <a:spcAft>
-                <a:spcPts val="400"/>
+                <a:spcPts val="600"/>
               </a:spcAft>
-              <a:defRPr sz="1100"/>
+              <a:defRPr sz="1150">
+                <a:latin typeface="Segoe UI"/>
+              </a:defRPr>
             </a:pPr>
             <a:r>
-              <a:t>• Kharif: Highest yield (5.64 t/ha), profit (₹1,78,915), but also highest disease risk (54.5%)</a:t>
+              <a:rPr b="1">
+                <a:solidFill>
+                  <a:srgbClr val="1E293B"/>
+                </a:solidFill>
+              </a:rPr>
+              <a:t>2. Zaid Season Stress: </a:t>
+            </a:r>
+            <a:r>
+              <a:rPr>
+                <a:solidFill>
+                  <a:srgbClr val="1E293B"/>
+                </a:solidFill>
+              </a:rPr>
+              <a:t>Zaid is characterized by severe water deficit (299 mm rainfall), lowest yield (4.64 t/ha), and negative avg profit (-₹24,805). Only 35.5% of farms turn a profit.</a:t>
             </a:r>
           </a:p>
           <a:p>
             <a:pPr>
               <a:spcAft>
-                <a:spcPts val="400"/>
+                <a:spcPts val="600"/>
               </a:spcAft>
-              <a:defRPr sz="1100"/>
+              <a:defRPr sz="1150">
+                <a:latin typeface="Segoe UI"/>
+              </a:defRPr>
             </a:pPr>
             <a:r>
-              <a:t>• Zaid: Lowest yield (4.67 t/ha), negative avg profit — only 35.5% farms profitable</a:t>
+              <a:rPr b="1">
+                <a:solidFill>
+                  <a:srgbClr val="1E293B"/>
+                </a:solidFill>
+              </a:rPr>
+              <a:t>3. High Commercial Profitability: </a:t>
+            </a:r>
+            <a:r>
+              <a:rPr>
+                <a:solidFill>
+                  <a:srgbClr val="1E293B"/>
+                </a:solidFill>
+              </a:rPr>
+              <a:t>Sugarcane (₹8.17L) and Chilli (₹7.51L) generate substantial net profits, while food grains (Wheat, Rice, Maize) averaged net negative returns.</a:t>
             </a:r>
           </a:p>
           <a:p>
             <a:pPr>
               <a:spcAft>
-                <a:spcPts val="400"/>
+                <a:spcPts val="600"/>
               </a:spcAft>
-              <a:defRPr sz="1100"/>
+              <a:defRPr sz="1150">
+                <a:latin typeface="Segoe UI"/>
+              </a:defRPr>
             </a:pPr>
             <a:r>
-              <a:t>• Sugarcane &amp; Chilli are the most profitable crops in the dataset</a:t>
+              <a:rPr b="1">
+                <a:solidFill>
+                  <a:srgbClr val="1E293B"/>
+                </a:solidFill>
+              </a:rPr>
+              <a:t>4. Drip Irrigation Superiority: </a:t>
+            </a:r>
+            <a:r>
+              <a:rPr>
+                <a:solidFill>
+                  <a:srgbClr val="1E293B"/>
+                </a:solidFill>
+              </a:rPr>
+              <a:t>Drip irrigation generates the highest yield (6.58 t/ha) and strong water efficiency (6.27 t/1000m³), outperforming conventional flood methods.</a:t>
             </a:r>
           </a:p>
           <a:p>
             <a:pPr>
               <a:spcAft>
-                <a:spcPts val="400"/>
+                <a:spcPts val="600"/>
               </a:spcAft>
-              <a:defRPr sz="1100"/>
+              <a:defRPr sz="1150">
+                <a:latin typeface="Segoe UI"/>
+              </a:defRPr>
             </a:pPr>
             <a:r>
-              <a:t>• Drip irrigation associated with highest yield; Rainfed with highest water efficiency</a:t>
+              <a:rPr b="1">
+                <a:solidFill>
+                  <a:srgbClr val="1E293B"/>
+                </a:solidFill>
+              </a:rPr>
+              <a:t>5. Weather-Disease Linkage: </a:t>
+            </a:r>
+            <a:r>
+              <a:rPr>
+                <a:solidFill>
+                  <a:srgbClr val="1E293B"/>
+                </a:solidFill>
+              </a:rPr>
+              <a:t>Rainfall strongly correlates with pest risk (r = 0.622) and soil moisture (r = 0.509), necessitating proactive pesticide management in high monsoon seasons.</a:t>
             </a:r>
           </a:p>
           <a:p>
             <a:pPr>
               <a:spcAft>
-                <a:spcPts val="400"/>
+                <a:spcPts val="600"/>
               </a:spcAft>
-              <a:defRPr sz="1100"/>
+              <a:defRPr sz="1150">
+                <a:latin typeface="Segoe UI"/>
+              </a:defRPr>
             </a:pPr>
             <a:r>
-              <a:t>• Rainfall shows moderate positive association with disease risk (r = 0.625)</a:t>
-            </a:r>
-          </a:p>
-          <a:p>
-            <a:pPr>
-              <a:spcAft>
-                <a:spcPts val="400"/>
-              </a:spcAft>
-              <a:defRPr sz="1100"/>
-            </a:pPr>
-            <a:r>
-              <a:t>• Environmental factors show weak direct correlation with yield individually</a:t>
+              <a:rPr b="1">
+                <a:solidFill>
+                  <a:srgbClr val="1E293B"/>
+                </a:solidFill>
+              </a:rPr>
+              <a:t>6. Strong Production Drivers: </a:t>
+            </a:r>
+            <a:r>
+              <a:rPr>
+                <a:solidFill>
+                  <a:srgbClr val="1E293B"/>
+                </a:solidFill>
+              </a:rPr>
+              <a:t>Yield shows strong positive correlation with water efficiency (r = 0.913) and total harvest production (r = 0.883).</a:t>
             </a:r>
           </a:p>
         </p:txBody>
       </p:sp>
       <p:pic>
         <p:nvPicPr>
-          <p:cNvPr id="33" name="Picture 32" descr="12_correlation_heatmap.png"/>
+          <p:cNvPr id="33" name="Picture 32" descr="image.png"/>
           <p:cNvPicPr>
             <a:picLocks noChangeAspect="1"/>
           </p:cNvPicPr>
@@ -11048,14 +11173,50 @@
         </p:blipFill>
         <p:spPr>
           <a:xfrm>
-            <a:off x="6035040" y="1005840"/>
-            <a:ext cx="5303520" cy="4896798"/>
+            <a:off x="6217920" y="1051560"/>
+            <a:ext cx="5239512" cy="4837176"/>
           </a:xfrm>
           <a:prstGeom prst="rect">
             <a:avLst/>
           </a:prstGeom>
         </p:spPr>
       </p:pic>
+      <p:sp>
+        <p:nvSpPr>
+          <p:cNvPr id="34" name="TextBox 33"/>
+          <p:cNvSpPr txBox="1"/>
+          <p:nvPr/>
+        </p:nvSpPr>
+        <p:spPr>
+          <a:xfrm>
+            <a:off x="6217920" y="5943600"/>
+            <a:ext cx="5239512" cy="365760"/>
+          </a:xfrm>
+          <a:prstGeom prst="rect">
+            <a:avLst/>
+          </a:prstGeom>
+          <a:noFill/>
+        </p:spPr>
+        <p:txBody>
+          <a:bodyPr wrap="none">
+            <a:spAutoFit/>
+          </a:bodyPr>
+          <a:lstStyle/>
+          <a:p>
+            <a:pPr algn="ctr">
+              <a:defRPr sz="1050">
+                <a:solidFill>
+                  <a:srgbClr val="475569"/>
+                </a:solidFill>
+                <a:latin typeface="Segoe UI"/>
+              </a:defRPr>
+            </a:pPr>
+            <a:r>
+              <a:t>Figure 12: Pearson Correlation Matrix across 28 Features (|r| &gt; 0.3 labeled)</a:t>
+            </a:r>
+          </a:p>
+        </p:txBody>
+      </p:sp>
     </p:spTree>
     <p:extLst>
       <p:ext uri="{BB962C8B-B14F-4D97-AF65-F5344CB8AC3E}">
@@ -11559,16 +11720,18 @@
         <p:spPr>
           <a:xfrm>
             <a:off x="0" y="0"/>
-            <a:ext cx="12192000" cy="731520"/>
+            <a:ext cx="12191999" cy="731520"/>
           </a:xfrm>
           <a:prstGeom prst="rect">
             <a:avLst/>
           </a:prstGeom>
           <a:solidFill>
-            <a:srgbClr val="E63946"/>
+            <a:srgbClr val="1B365D"/>
           </a:solidFill>
           <a:ln>
-            <a:noFill/>
+            <a:solidFill>
+              <a:srgbClr val="1B365D"/>
+            </a:solidFill>
           </a:ln>
         </p:spPr>
         <p:style>
@@ -11586,118 +11749,445 @@
           </a:fontRef>
         </p:style>
         <p:txBody>
-          <a:bodyPr rtlCol="0" anchor="ctr" wrap="square" lIns="457200"/>
+          <a:bodyPr rtlCol="0" anchor="ctr" wrap="square"/>
           <a:lstStyle/>
           <a:p>
-            <a:pPr algn="l">
-              <a:defRPr sz="2400" b="1">
+            <a:pPr algn="ctr">
+              <a:defRPr sz="2200" b="1">
                 <a:solidFill>
                   <a:srgbClr val="FFFFFF"/>
                 </a:solidFill>
+                <a:latin typeface="Segoe UI"/>
               </a:defRPr>
             </a:pPr>
             <a:r>
-              <a:t>  Future Scope</a:t>
+              <a:t>   Future Scope &amp; Strategic Roadmap</a:t>
             </a:r>
           </a:p>
         </p:txBody>
       </p:sp>
       <p:sp>
         <p:nvSpPr>
-          <p:cNvPr id="25" name="TextBox 24"/>
-          <p:cNvSpPr txBox="1"/>
+          <p:cNvPr id="25" name="Rounded Rectangle 24"/>
+          <p:cNvSpPr/>
           <p:nvPr/>
         </p:nvSpPr>
         <p:spPr>
           <a:xfrm>
-            <a:off x="457200" y="1097280"/>
-            <a:ext cx="8229600" cy="3657600"/>
+            <a:off x="731520" y="1051560"/>
+            <a:ext cx="5120640" cy="1600200"/>
           </a:xfrm>
-          <a:prstGeom prst="rect">
+          <a:prstGeom prst="roundRect">
             <a:avLst/>
           </a:prstGeom>
-          <a:noFill/>
+          <a:solidFill>
+            <a:srgbClr val="F8FAFC"/>
+          </a:solidFill>
+          <a:ln>
+            <a:solidFill>
+              <a:srgbClr val="CBD5E1"/>
+            </a:solidFill>
+          </a:ln>
         </p:spPr>
+        <p:style>
+          <a:lnRef idx="1">
+            <a:schemeClr val="accent1"/>
+          </a:lnRef>
+          <a:fillRef idx="3">
+            <a:schemeClr val="accent1"/>
+          </a:fillRef>
+          <a:effectRef idx="2">
+            <a:schemeClr val="accent1"/>
+          </a:effectRef>
+          <a:fontRef idx="minor">
+            <a:schemeClr val="lt1"/>
+          </a:fontRef>
+        </p:style>
         <p:txBody>
-          <a:bodyPr wrap="square">
-            <a:spAutoFit/>
-          </a:bodyPr>
+          <a:bodyPr rtlCol="0" anchor="ctr" wrap="square" lIns="228600" tIns="182880" rIns="228600"/>
           <a:lstStyle/>
           <a:p>
-            <a:pPr>
+            <a:pPr algn="ctr">
               <a:spcAft>
                 <a:spcPts val="400"/>
               </a:spcAft>
-              <a:defRPr sz="1400"/>
+              <a:defRPr sz="1500" b="1">
+                <a:solidFill>
+                  <a:srgbClr val="1B365D"/>
+                </a:solidFill>
+                <a:latin typeface="Segoe UI"/>
+              </a:defRPr>
             </a:pPr>
             <a:r>
-              <a:t>• Predictive modeling — Use machine learning to forecast seasonal yields</a:t>
+              <a:t>Predictive Yield &amp; Risk Modeling</a:t>
             </a:r>
           </a:p>
           <a:p>
             <a:pPr>
+              <a:defRPr sz="1200">
+                <a:solidFill>
+                  <a:srgbClr val="1E293B"/>
+                </a:solidFill>
+                <a:latin typeface="Segoe UI"/>
+              </a:defRPr>
+            </a:pPr>
+            <a:r>
+              <a:t>Train supervised machine learning models (Random Forest, XGBoost) on historical multi-season data to forecast crop yield and early-stage pest probabilities prior to planting.</a:t>
+            </a:r>
+          </a:p>
+        </p:txBody>
+      </p:sp>
+      <p:sp>
+        <p:nvSpPr>
+          <p:cNvPr id="26" name="Rounded Rectangle 25"/>
+          <p:cNvSpPr/>
+          <p:nvPr/>
+        </p:nvSpPr>
+        <p:spPr>
+          <a:xfrm>
+            <a:off x="731520" y="2834640"/>
+            <a:ext cx="5120640" cy="1600200"/>
+          </a:xfrm>
+          <a:prstGeom prst="roundRect">
+            <a:avLst/>
+          </a:prstGeom>
+          <a:solidFill>
+            <a:srgbClr val="F8FAFC"/>
+          </a:solidFill>
+          <a:ln>
+            <a:solidFill>
+              <a:srgbClr val="CBD5E1"/>
+            </a:solidFill>
+          </a:ln>
+        </p:spPr>
+        <p:style>
+          <a:lnRef idx="1">
+            <a:schemeClr val="accent1"/>
+          </a:lnRef>
+          <a:fillRef idx="3">
+            <a:schemeClr val="accent1"/>
+          </a:fillRef>
+          <a:effectRef idx="2">
+            <a:schemeClr val="accent1"/>
+          </a:effectRef>
+          <a:fontRef idx="minor">
+            <a:schemeClr val="lt1"/>
+          </a:fontRef>
+        </p:style>
+        <p:txBody>
+          <a:bodyPr rtlCol="0" anchor="ctr" wrap="square" lIns="228600" tIns="182880" rIns="228600"/>
+          <a:lstStyle/>
+          <a:p>
+            <a:pPr algn="ctr">
               <a:spcAft>
                 <a:spcPts val="400"/>
               </a:spcAft>
-              <a:defRPr sz="1400"/>
+              <a:defRPr sz="1500" b="1">
+                <a:solidFill>
+                  <a:srgbClr val="1B365D"/>
+                </a:solidFill>
+                <a:latin typeface="Segoe UI"/>
+              </a:defRPr>
             </a:pPr>
             <a:r>
-              <a:t>• Time-series analysis — Track performance trends over multiple years</a:t>
+              <a:t>Longitudinal Multi-Year Studies</a:t>
             </a:r>
           </a:p>
           <a:p>
             <a:pPr>
+              <a:defRPr sz="1200">
+                <a:solidFill>
+                  <a:srgbClr val="1E293B"/>
+                </a:solidFill>
+                <a:latin typeface="Segoe UI"/>
+              </a:defRPr>
+            </a:pPr>
+            <a:r>
+              <a:t>Expand analysis across 5–10 years to distinguish macro climate change trends from regular seasonal variation and assess long-term soil nutrient degradation.</a:t>
+            </a:r>
+          </a:p>
+        </p:txBody>
+      </p:sp>
+      <p:sp>
+        <p:nvSpPr>
+          <p:cNvPr id="27" name="Rounded Rectangle 26"/>
+          <p:cNvSpPr/>
+          <p:nvPr/>
+        </p:nvSpPr>
+        <p:spPr>
+          <a:xfrm>
+            <a:off x="731520" y="4617720"/>
+            <a:ext cx="5120640" cy="1600200"/>
+          </a:xfrm>
+          <a:prstGeom prst="roundRect">
+            <a:avLst/>
+          </a:prstGeom>
+          <a:solidFill>
+            <a:srgbClr val="F8FAFC"/>
+          </a:solidFill>
+          <a:ln>
+            <a:solidFill>
+              <a:srgbClr val="CBD5E1"/>
+            </a:solidFill>
+          </a:ln>
+        </p:spPr>
+        <p:style>
+          <a:lnRef idx="1">
+            <a:schemeClr val="accent1"/>
+          </a:lnRef>
+          <a:fillRef idx="3">
+            <a:schemeClr val="accent1"/>
+          </a:fillRef>
+          <a:effectRef idx="2">
+            <a:schemeClr val="accent1"/>
+          </a:effectRef>
+          <a:fontRef idx="minor">
+            <a:schemeClr val="lt1"/>
+          </a:fontRef>
+        </p:style>
+        <p:txBody>
+          <a:bodyPr rtlCol="0" anchor="ctr" wrap="square" lIns="228600" tIns="182880" rIns="228600"/>
+          <a:lstStyle/>
+          <a:p>
+            <a:pPr algn="ctr">
               <a:spcAft>
                 <a:spcPts val="400"/>
               </a:spcAft>
-              <a:defRPr sz="1400"/>
+              <a:defRPr sz="1500" b="1">
+                <a:solidFill>
+                  <a:srgbClr val="1B365D"/>
+                </a:solidFill>
+                <a:latin typeface="Segoe UI"/>
+              </a:defRPr>
             </a:pPr>
             <a:r>
-              <a:t>• Regional deep-dive — State/district-level analysis for localized insights</a:t>
+              <a:t>Precision Micro-Irrigation Adoption</a:t>
             </a:r>
           </a:p>
           <a:p>
             <a:pPr>
+              <a:defRPr sz="1200">
+                <a:solidFill>
+                  <a:srgbClr val="1E293B"/>
+                </a:solidFill>
+                <a:latin typeface="Segoe UI"/>
+              </a:defRPr>
+            </a:pPr>
+            <a:r>
+              <a:t>Formulate state-level subsidy transitions from flood irrigation to drip and sprinkler systems, targeting arid regions during the vulnerable Zaid season.</a:t>
+            </a:r>
+          </a:p>
+        </p:txBody>
+      </p:sp>
+      <p:sp>
+        <p:nvSpPr>
+          <p:cNvPr id="28" name="Rounded Rectangle 27"/>
+          <p:cNvSpPr/>
+          <p:nvPr/>
+        </p:nvSpPr>
+        <p:spPr>
+          <a:xfrm>
+            <a:off x="6336792" y="1051560"/>
+            <a:ext cx="5120640" cy="1600200"/>
+          </a:xfrm>
+          <a:prstGeom prst="roundRect">
+            <a:avLst/>
+          </a:prstGeom>
+          <a:solidFill>
+            <a:srgbClr val="F8FAFC"/>
+          </a:solidFill>
+          <a:ln>
+            <a:solidFill>
+              <a:srgbClr val="CBD5E1"/>
+            </a:solidFill>
+          </a:ln>
+        </p:spPr>
+        <p:style>
+          <a:lnRef idx="1">
+            <a:schemeClr val="accent1"/>
+          </a:lnRef>
+          <a:fillRef idx="3">
+            <a:schemeClr val="accent1"/>
+          </a:fillRef>
+          <a:effectRef idx="2">
+            <a:schemeClr val="accent1"/>
+          </a:effectRef>
+          <a:fontRef idx="minor">
+            <a:schemeClr val="lt1"/>
+          </a:fontRef>
+        </p:style>
+        <p:txBody>
+          <a:bodyPr rtlCol="0" anchor="ctr" wrap="square" lIns="228600" tIns="182880" rIns="228600"/>
+          <a:lstStyle/>
+          <a:p>
+            <a:pPr algn="ctr">
               <a:spcAft>
                 <a:spcPts val="400"/>
               </a:spcAft>
-              <a:defRPr sz="1400"/>
+              <a:defRPr sz="1500" b="1">
+                <a:solidFill>
+                  <a:srgbClr val="1B365D"/>
+                </a:solidFill>
+                <a:latin typeface="Segoe UI"/>
+              </a:defRPr>
             </a:pPr>
             <a:r>
-              <a:t>• Cost optimization — Detailed cost-benefit analysis per crop per season</a:t>
+              <a:t>Crop Diversification &amp; Soil Management</a:t>
             </a:r>
           </a:p>
           <a:p>
             <a:pPr>
+              <a:defRPr sz="1200">
+                <a:solidFill>
+                  <a:srgbClr val="1E293B"/>
+                </a:solidFill>
+                <a:latin typeface="Segoe UI"/>
+              </a:defRPr>
+            </a:pPr>
+            <a:r>
+              <a:t>Encourage farmers to intercrop high-margin cash crops (Chilli, Groundnut) with nitrogen-fixing pulses to offset market risks and preserve soil health.</a:t>
+            </a:r>
+          </a:p>
+        </p:txBody>
+      </p:sp>
+      <p:sp>
+        <p:nvSpPr>
+          <p:cNvPr id="29" name="Rounded Rectangle 28"/>
+          <p:cNvSpPr/>
+          <p:nvPr/>
+        </p:nvSpPr>
+        <p:spPr>
+          <a:xfrm>
+            <a:off x="6336792" y="2834640"/>
+            <a:ext cx="5120640" cy="1600200"/>
+          </a:xfrm>
+          <a:prstGeom prst="roundRect">
+            <a:avLst/>
+          </a:prstGeom>
+          <a:solidFill>
+            <a:srgbClr val="F8FAFC"/>
+          </a:solidFill>
+          <a:ln>
+            <a:solidFill>
+              <a:srgbClr val="CBD5E1"/>
+            </a:solidFill>
+          </a:ln>
+        </p:spPr>
+        <p:style>
+          <a:lnRef idx="1">
+            <a:schemeClr val="accent1"/>
+          </a:lnRef>
+          <a:fillRef idx="3">
+            <a:schemeClr val="accent1"/>
+          </a:fillRef>
+          <a:effectRef idx="2">
+            <a:schemeClr val="accent1"/>
+          </a:effectRef>
+          <a:fontRef idx="minor">
+            <a:schemeClr val="lt1"/>
+          </a:fontRef>
+        </p:style>
+        <p:txBody>
+          <a:bodyPr rtlCol="0" anchor="ctr" wrap="square" lIns="228600" tIns="182880" rIns="228600"/>
+          <a:lstStyle/>
+          <a:p>
+            <a:pPr algn="ctr">
               <a:spcAft>
                 <a:spcPts val="400"/>
               </a:spcAft>
-              <a:defRPr sz="1400"/>
+              <a:defRPr sz="1500" b="1">
+                <a:solidFill>
+                  <a:srgbClr val="1B365D"/>
+                </a:solidFill>
+                <a:latin typeface="Segoe UI"/>
+              </a:defRPr>
             </a:pPr>
             <a:r>
-              <a:t>• Real-time dashboards — Interactive visualization tools for stakeholders</a:t>
+              <a:t>Interactive Decision Support Systems</a:t>
             </a:r>
           </a:p>
           <a:p>
             <a:pPr>
+              <a:defRPr sz="1200">
+                <a:solidFill>
+                  <a:srgbClr val="1E293B"/>
+                </a:solidFill>
+                <a:latin typeface="Segoe UI"/>
+              </a:defRPr>
+            </a:pPr>
+            <a:r>
+              <a:t>Deploy open-access web applications (Streamlit / Power BI) enabling farmers and local extension officers to input soil/weather conditions and receive customized crop advice.</a:t>
+            </a:r>
+          </a:p>
+        </p:txBody>
+      </p:sp>
+      <p:sp>
+        <p:nvSpPr>
+          <p:cNvPr id="30" name="Rounded Rectangle 29"/>
+          <p:cNvSpPr/>
+          <p:nvPr/>
+        </p:nvSpPr>
+        <p:spPr>
+          <a:xfrm>
+            <a:off x="6336792" y="4617720"/>
+            <a:ext cx="5120640" cy="1600200"/>
+          </a:xfrm>
+          <a:prstGeom prst="roundRect">
+            <a:avLst/>
+          </a:prstGeom>
+          <a:solidFill>
+            <a:srgbClr val="F8FAFC"/>
+          </a:solidFill>
+          <a:ln>
+            <a:solidFill>
+              <a:srgbClr val="CBD5E1"/>
+            </a:solidFill>
+          </a:ln>
+        </p:spPr>
+        <p:style>
+          <a:lnRef idx="1">
+            <a:schemeClr val="accent1"/>
+          </a:lnRef>
+          <a:fillRef idx="3">
+            <a:schemeClr val="accent1"/>
+          </a:fillRef>
+          <a:effectRef idx="2">
+            <a:schemeClr val="accent1"/>
+          </a:effectRef>
+          <a:fontRef idx="minor">
+            <a:schemeClr val="lt1"/>
+          </a:fontRef>
+        </p:style>
+        <p:txBody>
+          <a:bodyPr rtlCol="0" anchor="ctr" wrap="square" lIns="228600" tIns="182880" rIns="228600"/>
+          <a:lstStyle/>
+          <a:p>
+            <a:pPr algn="ctr">
               <a:spcAft>
                 <a:spcPts val="400"/>
               </a:spcAft>
-              <a:defRPr sz="1400"/>
+              <a:defRPr sz="1500" b="1">
+                <a:solidFill>
+                  <a:srgbClr val="1B365D"/>
+                </a:solidFill>
+                <a:latin typeface="Segoe UI"/>
+              </a:defRPr>
             </a:pPr>
             <a:r>
-              <a:t>• Weather integration — Combine with live weather data for dynamic planning</a:t>
+              <a:t>IoT &amp; Weather Station Sensor Feeds</a:t>
             </a:r>
           </a:p>
           <a:p>
             <a:pPr>
-              <a:spcAft>
-                <a:spcPts val="400"/>
-              </a:spcAft>
-              <a:defRPr sz="1400"/>
+              <a:defRPr sz="1200">
+                <a:solidFill>
+                  <a:srgbClr val="1E293B"/>
+                </a:solidFill>
+                <a:latin typeface="Segoe UI"/>
+              </a:defRPr>
             </a:pPr>
             <a:r>
-              <a:t>• Crop recommendation system — Suggest optimal crops based on conditions</a:t>
+              <a:t>Integrate live field sensor telemetry (soil moisture probes, local rain gauges) with automated SMS advisories for precision pesticide application.</a:t>
             </a:r>
           </a:p>
         </p:txBody>
@@ -12089,16 +12579,18 @@
         <p:spPr>
           <a:xfrm>
             <a:off x="0" y="0"/>
-            <a:ext cx="12192000" cy="731520"/>
+            <a:ext cx="12191999" cy="731520"/>
           </a:xfrm>
           <a:prstGeom prst="rect">
             <a:avLst/>
           </a:prstGeom>
           <a:solidFill>
-            <a:srgbClr val="E63946"/>
+            <a:srgbClr val="1B365D"/>
           </a:solidFill>
           <a:ln>
-            <a:noFill/>
+            <a:solidFill>
+              <a:srgbClr val="1B365D"/>
+            </a:solidFill>
           </a:ln>
         </p:spPr>
         <p:style>
@@ -12116,52 +12608,107 @@
           </a:fontRef>
         </p:style>
         <p:txBody>
-          <a:bodyPr rtlCol="0" anchor="ctr" wrap="square" lIns="457200"/>
+          <a:bodyPr rtlCol="0" anchor="ctr" wrap="square"/>
           <a:lstStyle/>
           <a:p>
-            <a:pPr algn="l">
-              <a:defRPr sz="2400" b="1">
+            <a:pPr algn="ctr">
+              <a:defRPr sz="2200" b="1">
                 <a:solidFill>
                   <a:srgbClr val="FFFFFF"/>
                 </a:solidFill>
+                <a:latin typeface="Segoe UI"/>
               </a:defRPr>
             </a:pPr>
             <a:r>
-              <a:t>  GitHub Repository</a:t>
+              <a:t>   GitHub Repository &amp; Project Deliverables</a:t>
             </a:r>
           </a:p>
         </p:txBody>
       </p:sp>
       <p:sp>
         <p:nvSpPr>
-          <p:cNvPr id="25" name="TextBox 24"/>
-          <p:cNvSpPr txBox="1"/>
+          <p:cNvPr id="25" name="Rounded Rectangle 24"/>
+          <p:cNvSpPr/>
           <p:nvPr/>
         </p:nvSpPr>
         <p:spPr>
           <a:xfrm>
-            <a:off x="914400" y="2286000"/>
-            <a:ext cx="7315200" cy="731520"/>
+            <a:off x="731520" y="960120"/>
+            <a:ext cx="10728655" cy="1371600"/>
           </a:xfrm>
-          <a:prstGeom prst="rect">
+          <a:prstGeom prst="roundRect">
             <a:avLst/>
           </a:prstGeom>
-          <a:noFill/>
+          <a:solidFill>
+            <a:srgbClr val="F8FAFC"/>
+          </a:solidFill>
+          <a:ln w="25400">
+            <a:solidFill>
+              <a:srgbClr val="1B365D"/>
+            </a:solidFill>
+          </a:ln>
         </p:spPr>
+        <p:style>
+          <a:lnRef idx="1">
+            <a:schemeClr val="accent1"/>
+          </a:lnRef>
+          <a:fillRef idx="3">
+            <a:schemeClr val="accent1"/>
+          </a:fillRef>
+          <a:effectRef idx="2">
+            <a:schemeClr val="accent1"/>
+          </a:effectRef>
+          <a:fontRef idx="minor">
+            <a:schemeClr val="lt1"/>
+          </a:fontRef>
+        </p:style>
         <p:txBody>
-          <a:bodyPr wrap="square">
-            <a:spAutoFit/>
-          </a:bodyPr>
+          <a:bodyPr rtlCol="0" anchor="ctr" wrap="square" lIns="274320" tIns="164592"/>
           <a:lstStyle/>
           <a:p>
             <a:pPr algn="ctr">
-              <a:defRPr sz="1800" b="1">
-                <a:solidFill>
-                  <a:srgbClr val="333333"/>
-                </a:solidFill>
+              <a:spcAft>
+                <a:spcPts val="200"/>
+              </a:spcAft>
+              <a:defRPr sz="1200" b="1">
+                <a:solidFill>
+                  <a:srgbClr val="475569"/>
+                </a:solidFill>
+                <a:latin typeface="Segoe UI"/>
               </a:defRPr>
             </a:pPr>
             <a:r>
+              <a:t>PUBLIC SOURCE CODE REPOSITORY</a:t>
+            </a:r>
+          </a:p>
+          <a:p>
+            <a:pPr>
+              <a:spcAft>
+                <a:spcPts val="400"/>
+              </a:spcAft>
+              <a:defRPr sz="1900" b="1">
+                <a:solidFill>
+                  <a:srgbClr val="1B365D"/>
+                </a:solidFill>
+                <a:latin typeface="Segoe UI"/>
+              </a:defRPr>
+            </a:pPr>
+            <a:r>
+              <a:t>krishna3163 / Seasonal-Agriculture-Performance-Analysis</a:t>
+            </a:r>
+          </a:p>
+          <a:p>
+            <a:pPr>
+              <a:defRPr sz="1400">
+                <a:latin typeface="Segoe UI"/>
+              </a:defRPr>
+            </a:pPr>
+            <a:r>
+              <a:rPr b="1" u="sng">
+                <a:solidFill>
+                  <a:srgbClr val="1D4ED8"/>
+                </a:solidFill>
+              </a:rPr>
               <a:t>https://github.com/krishna3163/Seasonal-Agriculture-Performance-Analysis</a:t>
             </a:r>
           </a:p>
@@ -12169,83 +12716,540 @@
       </p:sp>
       <p:sp>
         <p:nvSpPr>
-          <p:cNvPr id="26" name="TextBox 25"/>
-          <p:cNvSpPr txBox="1"/>
+          <p:cNvPr id="26" name="Rounded Rectangle 25"/>
+          <p:cNvSpPr/>
           <p:nvPr/>
         </p:nvSpPr>
         <p:spPr>
           <a:xfrm>
-            <a:off x="1828800" y="3200400"/>
-            <a:ext cx="5486400" cy="1371600"/>
+            <a:off x="731520" y="2514600"/>
+            <a:ext cx="2468880" cy="3611880"/>
           </a:xfrm>
-          <a:prstGeom prst="rect">
+          <a:prstGeom prst="roundRect">
             <a:avLst/>
           </a:prstGeom>
-          <a:noFill/>
+          <a:solidFill>
+            <a:srgbClr val="F8FAFC"/>
+          </a:solidFill>
+          <a:ln>
+            <a:solidFill>
+              <a:srgbClr val="CBD5E1"/>
+            </a:solidFill>
+          </a:ln>
         </p:spPr>
+        <p:style>
+          <a:lnRef idx="1">
+            <a:schemeClr val="accent1"/>
+          </a:lnRef>
+          <a:fillRef idx="3">
+            <a:schemeClr val="accent1"/>
+          </a:fillRef>
+          <a:effectRef idx="2">
+            <a:schemeClr val="accent1"/>
+          </a:effectRef>
+          <a:fontRef idx="minor">
+            <a:schemeClr val="lt1"/>
+          </a:fontRef>
+        </p:style>
         <p:txBody>
-          <a:bodyPr wrap="square">
-            <a:spAutoFit/>
-          </a:bodyPr>
+          <a:bodyPr rtlCol="0" anchor="ctr" wrap="square" lIns="182880" tIns="182880" rIns="182880"/>
           <a:lstStyle/>
           <a:p>
+            <a:pPr algn="ctr">
+              <a:defRPr sz="1500" b="1">
+                <a:solidFill>
+                  <a:srgbClr val="1B365D"/>
+                </a:solidFill>
+                <a:latin typeface="Segoe UI"/>
+              </a:defRPr>
+            </a:pPr>
+            <a:r>
+              <a:t>Jupyter Notebook</a:t>
+            </a:r>
+          </a:p>
+          <a:p>
             <a:pPr>
-              <a:defRPr sz="1400">
-                <a:solidFill>
-                  <a:srgbClr val="505050"/>
-                </a:solidFill>
+              <a:spcAft>
+                <a:spcPts val="1000"/>
+              </a:spcAft>
+              <a:defRPr sz="1100" b="1">
+                <a:solidFill>
+                  <a:srgbClr val="475569"/>
+                </a:solidFill>
+                <a:latin typeface="Segoe UI"/>
               </a:defRPr>
             </a:pPr>
             <a:r>
-              <a:t>Repository Contents:</a:t>
+              <a:t>[.ipynb]</a:t>
             </a:r>
           </a:p>
           <a:p>
             <a:pPr>
-              <a:defRPr sz="1400">
-                <a:solidFill>
-                  <a:srgbClr val="505050"/>
-                </a:solidFill>
+              <a:spcAft>
+                <a:spcPts val="600"/>
+              </a:spcAft>
+              <a:defRPr sz="1100">
+                <a:solidFill>
+                  <a:srgbClr val="1E293B"/>
+                </a:solidFill>
+                <a:latin typeface="Segoe UI"/>
               </a:defRPr>
             </a:pPr>
             <a:r>
-              <a:t>• Jupyter Notebook (.ipynb) with complete analysis</a:t>
+              <a:t>• Complete end-to-end data pipeline</a:t>
             </a:r>
           </a:p>
           <a:p>
             <a:pPr>
-              <a:defRPr sz="1400">
-                <a:solidFill>
-                  <a:srgbClr val="505050"/>
-                </a:solidFill>
+              <a:spcAft>
+                <a:spcPts val="600"/>
+              </a:spcAft>
+              <a:defRPr sz="1100">
+                <a:solidFill>
+                  <a:srgbClr val="1E293B"/>
+                </a:solidFill>
+                <a:latin typeface="Segoe UI"/>
               </a:defRPr>
             </a:pPr>
             <a:r>
-              <a:t>• Dataset (CSV) — 4,000 records × 28 features</a:t>
+              <a:t>• 85 cells (30 code, 55 markdown)</a:t>
             </a:r>
           </a:p>
           <a:p>
             <a:pPr>
-              <a:defRPr sz="1400">
-                <a:solidFill>
-                  <a:srgbClr val="505050"/>
-                </a:solidFill>
+              <a:spcAft>
+                <a:spcPts val="600"/>
+              </a:spcAft>
+              <a:defRPr sz="1100">
+                <a:solidFill>
+                  <a:srgbClr val="1E293B"/>
+                </a:solidFill>
+                <a:latin typeface="Segoe UI"/>
               </a:defRPr>
             </a:pPr>
             <a:r>
-              <a:t>• 12 High-Resolution Visualizations (charts/)</a:t>
+              <a:t>• Pre-executed outputs &amp; plots</a:t>
             </a:r>
           </a:p>
           <a:p>
             <a:pPr>
-              <a:defRPr sz="1400">
-                <a:solidFill>
-                  <a:srgbClr val="505050"/>
-                </a:solidFill>
+              <a:spcAft>
+                <a:spcPts val="600"/>
+              </a:spcAft>
+              <a:defRPr sz="1100">
+                <a:solidFill>
+                  <a:srgbClr val="1E293B"/>
+                </a:solidFill>
+                <a:latin typeface="Segoe UI"/>
               </a:defRPr>
             </a:pPr>
             <a:r>
-              <a:t>• Complete Documentation &amp; Verification Reports</a:t>
+              <a:t>• 0 errors, fully reproducible</a:t>
+            </a:r>
+          </a:p>
+        </p:txBody>
+      </p:sp>
+      <p:sp>
+        <p:nvSpPr>
+          <p:cNvPr id="27" name="Rounded Rectangle 26"/>
+          <p:cNvSpPr/>
+          <p:nvPr/>
+        </p:nvSpPr>
+        <p:spPr>
+          <a:xfrm>
+            <a:off x="3483864" y="2514600"/>
+            <a:ext cx="2468880" cy="3611880"/>
+          </a:xfrm>
+          <a:prstGeom prst="roundRect">
+            <a:avLst/>
+          </a:prstGeom>
+          <a:solidFill>
+            <a:srgbClr val="F8FAFC"/>
+          </a:solidFill>
+          <a:ln>
+            <a:solidFill>
+              <a:srgbClr val="CBD5E1"/>
+            </a:solidFill>
+          </a:ln>
+        </p:spPr>
+        <p:style>
+          <a:lnRef idx="1">
+            <a:schemeClr val="accent1"/>
+          </a:lnRef>
+          <a:fillRef idx="3">
+            <a:schemeClr val="accent1"/>
+          </a:fillRef>
+          <a:effectRef idx="2">
+            <a:schemeClr val="accent1"/>
+          </a:effectRef>
+          <a:fontRef idx="minor">
+            <a:schemeClr val="lt1"/>
+          </a:fontRef>
+        </p:style>
+        <p:txBody>
+          <a:bodyPr rtlCol="0" anchor="ctr" wrap="square" lIns="182880" tIns="182880" rIns="182880"/>
+          <a:lstStyle/>
+          <a:p>
+            <a:pPr algn="ctr">
+              <a:defRPr sz="1500" b="1">
+                <a:solidFill>
+                  <a:srgbClr val="1B365D"/>
+                </a:solidFill>
+                <a:latin typeface="Segoe UI"/>
+              </a:defRPr>
+            </a:pPr>
+            <a:r>
+              <a:t>Project Dataset</a:t>
+            </a:r>
+          </a:p>
+          <a:p>
+            <a:pPr>
+              <a:spcAft>
+                <a:spcPts val="1000"/>
+              </a:spcAft>
+              <a:defRPr sz="1100" b="1">
+                <a:solidFill>
+                  <a:srgbClr val="475569"/>
+                </a:solidFill>
+                <a:latin typeface="Segoe UI"/>
+              </a:defRPr>
+            </a:pPr>
+            <a:r>
+              <a:t>[.csv]</a:t>
+            </a:r>
+          </a:p>
+          <a:p>
+            <a:pPr>
+              <a:spcAft>
+                <a:spcPts val="600"/>
+              </a:spcAft>
+              <a:defRPr sz="1100">
+                <a:solidFill>
+                  <a:srgbClr val="1E293B"/>
+                </a:solidFill>
+                <a:latin typeface="Segoe UI"/>
+              </a:defRPr>
+            </a:pPr>
+            <a:r>
+              <a:t>• 4,000 farm records × 28 features</a:t>
+            </a:r>
+          </a:p>
+          <a:p>
+            <a:pPr>
+              <a:spcAft>
+                <a:spcPts val="600"/>
+              </a:spcAft>
+              <a:defRPr sz="1100">
+                <a:solidFill>
+                  <a:srgbClr val="1E293B"/>
+                </a:solidFill>
+                <a:latin typeface="Segoe UI"/>
+              </a:defRPr>
+            </a:pPr>
+            <a:r>
+              <a:t>• Original unmodified raw dataset</a:t>
+            </a:r>
+          </a:p>
+          <a:p>
+            <a:pPr>
+              <a:spcAft>
+                <a:spcPts val="600"/>
+              </a:spcAft>
+              <a:defRPr sz="1100">
+                <a:solidFill>
+                  <a:srgbClr val="1E293B"/>
+                </a:solidFill>
+                <a:latin typeface="Segoe UI"/>
+              </a:defRPr>
+            </a:pPr>
+            <a:r>
+              <a:t>• 3 seasons, 8 crops, 8 states</a:t>
+            </a:r>
+          </a:p>
+          <a:p>
+            <a:pPr>
+              <a:spcAft>
+                <a:spcPts val="600"/>
+              </a:spcAft>
+              <a:defRPr sz="1100">
+                <a:solidFill>
+                  <a:srgbClr val="1E293B"/>
+                </a:solidFill>
+                <a:latin typeface="Segoe UI"/>
+              </a:defRPr>
+            </a:pPr>
+            <a:r>
+              <a:t>• Full schema documentation</a:t>
+            </a:r>
+          </a:p>
+        </p:txBody>
+      </p:sp>
+      <p:sp>
+        <p:nvSpPr>
+          <p:cNvPr id="28" name="Rounded Rectangle 27"/>
+          <p:cNvSpPr/>
+          <p:nvPr/>
+        </p:nvSpPr>
+        <p:spPr>
+          <a:xfrm>
+            <a:off x="6236208" y="2514600"/>
+            <a:ext cx="2468880" cy="3611880"/>
+          </a:xfrm>
+          <a:prstGeom prst="roundRect">
+            <a:avLst/>
+          </a:prstGeom>
+          <a:solidFill>
+            <a:srgbClr val="F8FAFC"/>
+          </a:solidFill>
+          <a:ln>
+            <a:solidFill>
+              <a:srgbClr val="CBD5E1"/>
+            </a:solidFill>
+          </a:ln>
+        </p:spPr>
+        <p:style>
+          <a:lnRef idx="1">
+            <a:schemeClr val="accent1"/>
+          </a:lnRef>
+          <a:fillRef idx="3">
+            <a:schemeClr val="accent1"/>
+          </a:fillRef>
+          <a:effectRef idx="2">
+            <a:schemeClr val="accent1"/>
+          </a:effectRef>
+          <a:fontRef idx="minor">
+            <a:schemeClr val="lt1"/>
+          </a:fontRef>
+        </p:style>
+        <p:txBody>
+          <a:bodyPr rtlCol="0" anchor="ctr" wrap="square" lIns="182880" tIns="182880" rIns="182880"/>
+          <a:lstStyle/>
+          <a:p>
+            <a:pPr algn="ctr">
+              <a:defRPr sz="1500" b="1">
+                <a:solidFill>
+                  <a:srgbClr val="1B365D"/>
+                </a:solidFill>
+                <a:latin typeface="Segoe UI"/>
+              </a:defRPr>
+            </a:pPr>
+            <a:r>
+              <a:t>Visualizations</a:t>
+            </a:r>
+          </a:p>
+          <a:p>
+            <a:pPr>
+              <a:spcAft>
+                <a:spcPts val="1000"/>
+              </a:spcAft>
+              <a:defRPr sz="1100" b="1">
+                <a:solidFill>
+                  <a:srgbClr val="475569"/>
+                </a:solidFill>
+                <a:latin typeface="Segoe UI"/>
+              </a:defRPr>
+            </a:pPr>
+            <a:r>
+              <a:t>[charts/]</a:t>
+            </a:r>
+          </a:p>
+          <a:p>
+            <a:pPr>
+              <a:spcAft>
+                <a:spcPts val="600"/>
+              </a:spcAft>
+              <a:defRPr sz="1100">
+                <a:solidFill>
+                  <a:srgbClr val="1E293B"/>
+                </a:solidFill>
+                <a:latin typeface="Segoe UI"/>
+              </a:defRPr>
+            </a:pPr>
+            <a:r>
+              <a:t>• 12 high-resolution PNG plots</a:t>
+            </a:r>
+          </a:p>
+          <a:p>
+            <a:pPr>
+              <a:spcAft>
+                <a:spcPts val="600"/>
+              </a:spcAft>
+              <a:defRPr sz="1100">
+                <a:solidFill>
+                  <a:srgbClr val="1E293B"/>
+                </a:solidFill>
+                <a:latin typeface="Segoe UI"/>
+              </a:defRPr>
+            </a:pPr>
+            <a:r>
+              <a:t>• Season, crop &amp; irrigation charts</a:t>
+            </a:r>
+          </a:p>
+          <a:p>
+            <a:pPr>
+              <a:spcAft>
+                <a:spcPts val="600"/>
+              </a:spcAft>
+              <a:defRPr sz="1100">
+                <a:solidFill>
+                  <a:srgbClr val="1E293B"/>
+                </a:solidFill>
+                <a:latin typeface="Segoe UI"/>
+              </a:defRPr>
+            </a:pPr>
+            <a:r>
+              <a:t>• Correlation matrix heatmap</a:t>
+            </a:r>
+          </a:p>
+          <a:p>
+            <a:pPr>
+              <a:spcAft>
+                <a:spcPts val="600"/>
+              </a:spcAft>
+              <a:defRPr sz="1100">
+                <a:solidFill>
+                  <a:srgbClr val="1E293B"/>
+                </a:solidFill>
+                <a:latin typeface="Segoe UI"/>
+              </a:defRPr>
+            </a:pPr>
+            <a:r>
+              <a:t>• Official course certificate</a:t>
+            </a:r>
+          </a:p>
+        </p:txBody>
+      </p:sp>
+      <p:sp>
+        <p:nvSpPr>
+          <p:cNvPr id="29" name="Rounded Rectangle 28"/>
+          <p:cNvSpPr/>
+          <p:nvPr/>
+        </p:nvSpPr>
+        <p:spPr>
+          <a:xfrm>
+            <a:off x="8988552" y="2514600"/>
+            <a:ext cx="2468880" cy="3611880"/>
+          </a:xfrm>
+          <a:prstGeom prst="roundRect">
+            <a:avLst/>
+          </a:prstGeom>
+          <a:solidFill>
+            <a:srgbClr val="F8FAFC"/>
+          </a:solidFill>
+          <a:ln>
+            <a:solidFill>
+              <a:srgbClr val="CBD5E1"/>
+            </a:solidFill>
+          </a:ln>
+        </p:spPr>
+        <p:style>
+          <a:lnRef idx="1">
+            <a:schemeClr val="accent1"/>
+          </a:lnRef>
+          <a:fillRef idx="3">
+            <a:schemeClr val="accent1"/>
+          </a:fillRef>
+          <a:effectRef idx="2">
+            <a:schemeClr val="accent1"/>
+          </a:effectRef>
+          <a:fontRef idx="minor">
+            <a:schemeClr val="lt1"/>
+          </a:fontRef>
+        </p:style>
+        <p:txBody>
+          <a:bodyPr rtlCol="0" anchor="ctr" wrap="square" lIns="182880" tIns="182880" rIns="182880"/>
+          <a:lstStyle/>
+          <a:p>
+            <a:pPr algn="ctr">
+              <a:defRPr sz="1500" b="1">
+                <a:solidFill>
+                  <a:srgbClr val="1B365D"/>
+                </a:solidFill>
+                <a:latin typeface="Segoe UI"/>
+              </a:defRPr>
+            </a:pPr>
+            <a:r>
+              <a:t>Documentation</a:t>
+            </a:r>
+          </a:p>
+          <a:p>
+            <a:pPr>
+              <a:spcAft>
+                <a:spcPts val="1000"/>
+              </a:spcAft>
+              <a:defRPr sz="1100" b="1">
+                <a:solidFill>
+                  <a:srgbClr val="475569"/>
+                </a:solidFill>
+                <a:latin typeface="Segoe UI"/>
+              </a:defRPr>
+            </a:pPr>
+            <a:r>
+              <a:t>[.md]</a:t>
+            </a:r>
+          </a:p>
+          <a:p>
+            <a:pPr>
+              <a:spcAft>
+                <a:spcPts val="600"/>
+              </a:spcAft>
+              <a:defRPr sz="1100">
+                <a:solidFill>
+                  <a:srgbClr val="1E293B"/>
+                </a:solidFill>
+                <a:latin typeface="Segoe UI"/>
+              </a:defRPr>
+            </a:pPr>
+            <a:r>
+              <a:t>• Comprehensive README.md</a:t>
+            </a:r>
+          </a:p>
+          <a:p>
+            <a:pPr>
+              <a:spcAft>
+                <a:spcPts val="600"/>
+              </a:spcAft>
+              <a:defRPr sz="1100">
+                <a:solidFill>
+                  <a:srgbClr val="1E293B"/>
+                </a:solidFill>
+                <a:latin typeface="Segoe UI"/>
+              </a:defRPr>
+            </a:pPr>
+            <a:r>
+              <a:t>• Final Verification Report</a:t>
+            </a:r>
+          </a:p>
+          <a:p>
+            <a:pPr>
+              <a:spcAft>
+                <a:spcPts val="600"/>
+              </a:spcAft>
+              <a:defRPr sz="1100">
+                <a:solidFill>
+                  <a:srgbClr val="1E293B"/>
+                </a:solidFill>
+                <a:latin typeface="Segoe UI"/>
+              </a:defRPr>
+            </a:pPr>
+            <a:r>
+              <a:t>• Technical verification audit</a:t>
+            </a:r>
+          </a:p>
+          <a:p>
+            <a:pPr>
+              <a:spcAft>
+                <a:spcPts val="600"/>
+              </a:spcAft>
+              <a:defRPr sz="1100">
+                <a:solidFill>
+                  <a:srgbClr val="1E293B"/>
+                </a:solidFill>
+                <a:latin typeface="Segoe UI"/>
+              </a:defRPr>
+            </a:pPr>
+            <a:r>
+              <a:t>• AICTE/VOIS alignment audit</a:t>
             </a:r>
           </a:p>
         </p:txBody>
@@ -12637,16 +13641,18 @@
         <p:spPr>
           <a:xfrm>
             <a:off x="0" y="0"/>
-            <a:ext cx="12192000" cy="731520"/>
+            <a:ext cx="12191999" cy="731520"/>
           </a:xfrm>
           <a:prstGeom prst="rect">
             <a:avLst/>
           </a:prstGeom>
           <a:solidFill>
-            <a:srgbClr val="E63946"/>
+            <a:srgbClr val="1B365D"/>
           </a:solidFill>
           <a:ln>
-            <a:noFill/>
+            <a:solidFill>
+              <a:srgbClr val="1B365D"/>
+            </a:solidFill>
           </a:ln>
         </p:spPr>
         <p:style>
@@ -12664,11 +13670,19 @@
           </a:fontRef>
         </p:style>
         <p:txBody>
-          <a:bodyPr rtlCol="0" anchor="ctr" wrap="square" lIns="457200"/>
+          <a:bodyPr rtlCol="0" anchor="ctr" wrap="square"/>
           <a:lstStyle/>
           <a:p>
-            <a:r>
-              <a:t>  VOIS Course Completion Certificate — Data Visualization</a:t>
+            <a:pPr algn="ctr">
+              <a:defRPr sz="2200" b="1">
+                <a:solidFill>
+                  <a:srgbClr val="FFFFFF"/>
+                </a:solidFill>
+                <a:latin typeface="Segoe UI"/>
+              </a:defRPr>
+            </a:pPr>
+            <a:r>
+              <a:t>   VOIS Course Completion Certificate — Data Visualization</a:t>
             </a:r>
           </a:p>
         </p:txBody>
@@ -12681,8 +13695,8 @@
         </p:nvSpPr>
         <p:spPr>
           <a:xfrm>
-            <a:off x="914400" y="822960"/>
-            <a:ext cx="10360152" cy="365760"/>
+            <a:off x="731520" y="804672"/>
+            <a:ext cx="10728655" cy="411480"/>
           </a:xfrm>
           <a:prstGeom prst="rect">
             <a:avLst/>
@@ -12690,27 +13704,28 @@
           <a:noFill/>
         </p:spPr>
         <p:txBody>
-          <a:bodyPr wrap="square">
+          <a:bodyPr wrap="none">
             <a:spAutoFit/>
           </a:bodyPr>
           <a:lstStyle/>
           <a:p>
-            <a:pPr>
-              <a:defRPr sz="1400" b="1">
-                <a:solidFill>
-                  <a:srgbClr val="323232"/>
-                </a:solidFill>
+            <a:pPr algn="ctr">
+              <a:defRPr sz="1300" b="1">
+                <a:solidFill>
+                  <a:srgbClr val="1B365D"/>
+                </a:solidFill>
+                <a:latin typeface="Segoe UI"/>
               </a:defRPr>
             </a:pPr>
             <a:r>
-              <a:t>Course: Data Visualization  |  Certificate ID: VFLMS26_163451  |  Issued: September 6, 2026</a:t>
+              <a:t>Course: Data Visualization   |   Recipient: Krishna Kumar   |   Certificate ID: VFLMS26_163451   |   Issued: September 6, 2026</a:t>
             </a:r>
           </a:p>
         </p:txBody>
       </p:sp>
       <p:pic>
         <p:nvPicPr>
-          <p:cNvPr id="26" name="Picture 25" descr="certificate.png"/>
+          <p:cNvPr id="26" name="Picture 25" descr="image.png"/>
           <p:cNvPicPr>
             <a:picLocks noChangeAspect="1"/>
           </p:cNvPicPr>
@@ -12724,14 +13739,50 @@
         </p:blipFill>
         <p:spPr>
           <a:xfrm>
-            <a:off x="2475845" y="1280160"/>
-            <a:ext cx="7240308" cy="5120640"/>
+            <a:off x="2478024" y="1261872"/>
+            <a:ext cx="7242048" cy="5120640"/>
           </a:xfrm>
           <a:prstGeom prst="rect">
             <a:avLst/>
           </a:prstGeom>
         </p:spPr>
       </p:pic>
+      <p:sp>
+        <p:nvSpPr>
+          <p:cNvPr id="27" name="TextBox 26"/>
+          <p:cNvSpPr txBox="1"/>
+          <p:nvPr/>
+        </p:nvSpPr>
+        <p:spPr>
+          <a:xfrm>
+            <a:off x="731520" y="6419088"/>
+            <a:ext cx="10728655" cy="320040"/>
+          </a:xfrm>
+          <a:prstGeom prst="rect">
+            <a:avLst/>
+          </a:prstGeom>
+          <a:noFill/>
+        </p:spPr>
+        <p:txBody>
+          <a:bodyPr wrap="none">
+            <a:spAutoFit/>
+          </a:bodyPr>
+          <a:lstStyle/>
+          <a:p>
+            <a:pPr algn="ctr">
+              <a:defRPr sz="1050">
+                <a:solidFill>
+                  <a:srgbClr val="475569"/>
+                </a:solidFill>
+                <a:latin typeface="Segoe UI"/>
+              </a:defRPr>
+            </a:pPr>
+            <a:r>
+              <a:t>Verified VOIS For Tech &amp; Edunet Foundation LMS Credential   |   Directly Applicable to AICTE Internship Submission</a:t>
+            </a:r>
+          </a:p>
+        </p:txBody>
+      </p:sp>
     </p:spTree>
     <p:extLst>
       <p:ext uri="{BB962C8B-B14F-4D97-AF65-F5344CB8AC3E}">
@@ -13106,74 +14157,247 @@
       </p:grpSpPr>
       <p:sp>
         <p:nvSpPr>
-          <p:cNvPr id="46" name="TextBox 45"/>
-          <p:cNvSpPr txBox="1"/>
+          <p:cNvPr id="46" name="Rectangle 45"/>
+          <p:cNvSpPr/>
           <p:nvPr/>
         </p:nvSpPr>
         <p:spPr>
           <a:xfrm>
-            <a:off x="457200" y="1645920"/>
-            <a:ext cx="8229600" cy="1097280"/>
+            <a:off x="0" y="0"/>
+            <a:ext cx="12191999" cy="137160"/>
           </a:xfrm>
           <a:prstGeom prst="rect">
             <a:avLst/>
           </a:prstGeom>
-          <a:noFill/>
+          <a:solidFill>
+            <a:srgbClr val="1B365D"/>
+          </a:solidFill>
+          <a:ln>
+            <a:noFill/>
+          </a:ln>
         </p:spPr>
+        <p:style>
+          <a:lnRef idx="1">
+            <a:schemeClr val="accent1"/>
+          </a:lnRef>
+          <a:fillRef idx="3">
+            <a:schemeClr val="accent1"/>
+          </a:fillRef>
+          <a:effectRef idx="2">
+            <a:schemeClr val="accent1"/>
+          </a:effectRef>
+          <a:fontRef idx="minor">
+            <a:schemeClr val="lt1"/>
+          </a:fontRef>
+        </p:style>
         <p:txBody>
-          <a:bodyPr wrap="square">
-            <a:spAutoFit/>
-          </a:bodyPr>
+          <a:bodyPr rtlCol="0" anchor="ctr"/>
           <a:lstStyle/>
           <a:p>
-            <a:pPr algn="ctr">
-              <a:defRPr sz="3600" b="1">
-                <a:solidFill>
-                  <a:srgbClr val="E63946"/>
-                </a:solidFill>
-              </a:defRPr>
-            </a:pPr>
-            <a:r>
-              <a:t>Thank You</a:t>
-            </a:r>
+            <a:pPr algn="ctr"/>
           </a:p>
         </p:txBody>
       </p:sp>
       <p:sp>
         <p:nvSpPr>
-          <p:cNvPr id="47" name="TextBox 46"/>
-          <p:cNvSpPr txBox="1"/>
+          <p:cNvPr id="47" name="Rounded Rectangle 46"/>
+          <p:cNvSpPr/>
           <p:nvPr/>
         </p:nvSpPr>
         <p:spPr>
           <a:xfrm>
-            <a:off x="914400" y="2926080"/>
-            <a:ext cx="7315200" cy="914400"/>
+            <a:off x="1828800" y="1097280"/>
+            <a:ext cx="8534095" cy="4572000"/>
           </a:xfrm>
-          <a:prstGeom prst="rect">
+          <a:prstGeom prst="roundRect">
             <a:avLst/>
           </a:prstGeom>
-          <a:noFill/>
+          <a:solidFill>
+            <a:srgbClr val="F8FAFC"/>
+          </a:solidFill>
+          <a:ln w="19050">
+            <a:solidFill>
+              <a:srgbClr val="CBD5E1"/>
+            </a:solidFill>
+          </a:ln>
         </p:spPr>
+        <p:style>
+          <a:lnRef idx="1">
+            <a:schemeClr val="accent1"/>
+          </a:lnRef>
+          <a:fillRef idx="3">
+            <a:schemeClr val="accent1"/>
+          </a:fillRef>
+          <a:effectRef idx="2">
+            <a:schemeClr val="accent1"/>
+          </a:effectRef>
+          <a:fontRef idx="minor">
+            <a:schemeClr val="lt1"/>
+          </a:fontRef>
+        </p:style>
         <p:txBody>
-          <a:bodyPr wrap="square">
-            <a:spAutoFit/>
-          </a:bodyPr>
+          <a:bodyPr rtlCol="0" anchor="ctr" wrap="square"/>
           <a:lstStyle/>
           <a:p>
             <a:pPr algn="ctr">
-              <a:defRPr sz="1400" b="0">
-                <a:solidFill>
-                  <a:srgbClr val="555555"/>
-                </a:solidFill>
+              <a:spcAft>
+                <a:spcPts val="600"/>
+              </a:spcAft>
+              <a:defRPr sz="3600" b="1">
+                <a:solidFill>
+                  <a:srgbClr val="1B365D"/>
+                </a:solidFill>
+                <a:latin typeface="Segoe UI"/>
               </a:defRPr>
             </a:pPr>
             <a:r>
+              <a:t>Thank You</a:t>
+            </a:r>
+          </a:p>
+          <a:p>
+            <a:pPr algn="ctr">
+              <a:spcAft>
+                <a:spcPts val="2000"/>
+              </a:spcAft>
+              <a:defRPr sz="1800">
+                <a:solidFill>
+                  <a:srgbClr val="475569"/>
+                </a:solidFill>
+                <a:latin typeface="Segoe UI"/>
+              </a:defRPr>
+            </a:pPr>
+            <a:r>
+              <a:t>Questions &amp; Discussion</a:t>
+            </a:r>
+          </a:p>
+          <a:p>
+            <a:pPr algn="ctr">
+              <a:spcAft>
+                <a:spcPts val="400"/>
+              </a:spcAft>
+              <a:defRPr sz="1300">
+                <a:latin typeface="Segoe UI"/>
+              </a:defRPr>
+            </a:pPr>
+            <a:r>
+              <a:rPr b="1">
+                <a:solidFill>
+                  <a:srgbClr val="475569"/>
+                </a:solidFill>
+              </a:rPr>
+              <a:t>Project: </a:t>
+            </a:r>
+            <a:r>
+              <a:rPr b="1">
+                <a:solidFill>
+                  <a:srgbClr val="1E293B"/>
+                </a:solidFill>
+              </a:rPr>
               <a:t>Seasonal Agriculture Performance Analysis</a:t>
             </a:r>
-            <a:br/>
-            <a:r>
-              <a:t>VOIS For Tech / AICTE Data Analytics Internship</a:t>
+          </a:p>
+          <a:p>
+            <a:pPr algn="ctr">
+              <a:spcAft>
+                <a:spcPts val="400"/>
+              </a:spcAft>
+              <a:defRPr sz="1300">
+                <a:latin typeface="Segoe UI"/>
+              </a:defRPr>
+            </a:pPr>
+            <a:r>
+              <a:rPr b="1">
+                <a:solidFill>
+                  <a:srgbClr val="475569"/>
+                </a:solidFill>
+              </a:rPr>
+              <a:t>Internship: </a:t>
+            </a:r>
+            <a:r>
+              <a:rPr b="0">
+                <a:solidFill>
+                  <a:srgbClr val="1E293B"/>
+                </a:solidFill>
+              </a:rPr>
+              <a:t>VOIS For Tech / AICTE Data Analytics Internship (Batch 2026–2027)</a:t>
+            </a:r>
+          </a:p>
+          <a:p>
+            <a:pPr algn="ctr">
+              <a:spcAft>
+                <a:spcPts val="400"/>
+              </a:spcAft>
+              <a:defRPr sz="1300">
+                <a:latin typeface="Segoe UI"/>
+              </a:defRPr>
+            </a:pPr>
+            <a:r>
+              <a:rPr b="1">
+                <a:solidFill>
+                  <a:srgbClr val="475569"/>
+                </a:solidFill>
+              </a:rPr>
+              <a:t>Student: </a:t>
+            </a:r>
+            <a:r>
+              <a:rPr b="1">
+                <a:solidFill>
+                  <a:srgbClr val="1E293B"/>
+                </a:solidFill>
+              </a:rPr>
+              <a:t>Krishna Kumar  |  AICTE STU ID: STU6a252b77248381780820855</a:t>
+            </a:r>
+          </a:p>
+          <a:p>
+            <a:pPr algn="ctr">
+              <a:spcAft>
+                <a:spcPts val="400"/>
+              </a:spcAft>
+              <a:defRPr sz="1300">
+                <a:latin typeface="Segoe UI"/>
+              </a:defRPr>
+            </a:pPr>
+            <a:r>
+              <a:rPr b="1">
+                <a:solidFill>
+                  <a:srgbClr val="475569"/>
+                </a:solidFill>
+              </a:rPr>
+              <a:t>Institution: </a:t>
+            </a:r>
+            <a:r>
+              <a:rPr b="0">
+                <a:solidFill>
+                  <a:srgbClr val="1E293B"/>
+                </a:solidFill>
+              </a:rPr>
+              <a:t>Ambalika Institute of Management and Technology, Lucknow</a:t>
+            </a:r>
+          </a:p>
+          <a:p>
+            <a:pPr algn="ctr">
+              <a:spcAft>
+                <a:spcPts val="400"/>
+              </a:spcAft>
+              <a:defRPr sz="1300">
+                <a:latin typeface="Segoe UI"/>
+              </a:defRPr>
+            </a:pPr>
+            <a:r>
+              <a:rPr b="1">
+                <a:solidFill>
+                  <a:srgbClr val="475569"/>
+                </a:solidFill>
+              </a:rPr>
+              <a:t>Repository: </a:t>
+            </a:r>
+            <a:r>
+              <a:rPr b="1">
+                <a:solidFill>
+                  <a:srgbClr val="1D4ED8"/>
+                </a:solidFill>
+              </a:rPr>
+              <a:t>https://github.com/krishna3163/Seasonal-Agriculture-Performance-Analysis</a:t>
             </a:r>
           </a:p>
         </p:txBody>
@@ -13843,16 +15067,18 @@
         <p:spPr>
           <a:xfrm>
             <a:off x="0" y="0"/>
-            <a:ext cx="12192000" cy="731520"/>
+            <a:ext cx="12191999" cy="731520"/>
           </a:xfrm>
           <a:prstGeom prst="rect">
             <a:avLst/>
           </a:prstGeom>
           <a:solidFill>
-            <a:srgbClr val="E63946"/>
+            <a:srgbClr val="1B365D"/>
           </a:solidFill>
           <a:ln>
-            <a:noFill/>
+            <a:solidFill>
+              <a:srgbClr val="1B365D"/>
+            </a:solidFill>
           </a:ln>
         </p:spPr>
         <p:style>
@@ -13870,107 +15096,317 @@
           </a:fontRef>
         </p:style>
         <p:txBody>
-          <a:bodyPr rtlCol="0" anchor="ctr" wrap="square" lIns="457200"/>
+          <a:bodyPr rtlCol="0" anchor="ctr" wrap="square"/>
           <a:lstStyle/>
           <a:p>
-            <a:pPr algn="l">
-              <a:defRPr sz="2400" b="1">
+            <a:pPr algn="ctr">
+              <a:defRPr sz="2200" b="1">
                 <a:solidFill>
                   <a:srgbClr val="FFFFFF"/>
                 </a:solidFill>
+                <a:latin typeface="Segoe UI"/>
               </a:defRPr>
             </a:pPr>
             <a:r>
-              <a:t>  Problem Statement</a:t>
+              <a:t>   Problem Statement</a:t>
             </a:r>
           </a:p>
         </p:txBody>
       </p:sp>
       <p:sp>
         <p:nvSpPr>
-          <p:cNvPr id="18" name="TextBox 17"/>
-          <p:cNvSpPr txBox="1"/>
+          <p:cNvPr id="18" name="Rounded Rectangle 17"/>
+          <p:cNvSpPr/>
           <p:nvPr/>
         </p:nvSpPr>
         <p:spPr>
           <a:xfrm>
-            <a:off x="457200" y="1097280"/>
-            <a:ext cx="8229600" cy="3657600"/>
+            <a:off x="731520" y="1051560"/>
+            <a:ext cx="5120640" cy="5212080"/>
           </a:xfrm>
-          <a:prstGeom prst="rect">
+          <a:prstGeom prst="roundRect">
             <a:avLst/>
           </a:prstGeom>
-          <a:noFill/>
+          <a:solidFill>
+            <a:srgbClr val="F8FAFC"/>
+          </a:solidFill>
+          <a:ln>
+            <a:solidFill>
+              <a:srgbClr val="CBD5E1"/>
+            </a:solidFill>
+          </a:ln>
         </p:spPr>
+        <p:style>
+          <a:lnRef idx="1">
+            <a:schemeClr val="accent1"/>
+          </a:lnRef>
+          <a:fillRef idx="3">
+            <a:schemeClr val="accent1"/>
+          </a:fillRef>
+          <a:effectRef idx="2">
+            <a:schemeClr val="accent1"/>
+          </a:effectRef>
+          <a:fontRef idx="minor">
+            <a:schemeClr val="lt1"/>
+          </a:fontRef>
+        </p:style>
         <p:txBody>
-          <a:bodyPr wrap="square">
-            <a:spAutoFit/>
-          </a:bodyPr>
+          <a:bodyPr rtlCol="0" anchor="ctr" wrap="square" lIns="274320" rIns="274320" tIns="274320"/>
           <a:lstStyle/>
+          <a:p>
+            <a:pPr algn="ctr">
+              <a:spcAft>
+                <a:spcPts val="1200"/>
+              </a:spcAft>
+              <a:defRPr sz="1700" b="1">
+                <a:solidFill>
+                  <a:srgbClr val="1B365D"/>
+                </a:solidFill>
+                <a:latin typeface="Segoe UI"/>
+              </a:defRPr>
+            </a:pPr>
+            <a:r>
+              <a:t>Agricultural Context &amp; Challenges</a:t>
+            </a:r>
+          </a:p>
           <a:p>
             <a:pPr>
               <a:spcAft>
-                <a:spcPts val="400"/>
+                <a:spcPts val="1200"/>
               </a:spcAft>
-              <a:defRPr sz="1400"/>
+              <a:defRPr sz="1300">
+                <a:latin typeface="Segoe UI"/>
+              </a:defRPr>
             </a:pPr>
             <a:r>
-              <a:t>• Agricultural performance is influenced by seasonal variations in environmental conditions, farming practices, and resource availability</a:t>
+              <a:rPr b="1">
+                <a:solidFill>
+                  <a:srgbClr val="1E293B"/>
+                </a:solidFill>
+              </a:rPr>
+              <a:t>• Seasonal Environmental Disparity: </a:t>
+            </a:r>
+            <a:r>
+              <a:rPr>
+                <a:solidFill>
+                  <a:srgbClr val="1E293B"/>
+                </a:solidFill>
+              </a:rPr>
+              <a:t>Agricultural outcomes in India vary drastically across Kharif (Monsoon), Rabi (Winter), and Zaid (Summer) seasons due to marked differences in precipitation, temperature, and solar radiation.</a:t>
             </a:r>
           </a:p>
           <a:p>
             <a:pPr>
               <a:spcAft>
-                <a:spcPts val="400"/>
+                <a:spcPts val="1200"/>
               </a:spcAft>
-              <a:defRPr sz="1400"/>
+              <a:defRPr sz="1300">
+                <a:latin typeface="Segoe UI"/>
+              </a:defRPr>
             </a:pPr>
             <a:r>
-              <a:t>• Raw agricultural data does not clearly explain how performance changes across seasons</a:t>
+              <a:rPr b="1">
+                <a:solidFill>
+                  <a:srgbClr val="1E293B"/>
+                </a:solidFill>
+              </a:rPr>
+              <a:t>• Information Gaps in Raw Data: </a:t>
+            </a:r>
+            <a:r>
+              <a:rPr>
+                <a:solidFill>
+                  <a:srgbClr val="1E293B"/>
+                </a:solidFill>
+              </a:rPr>
+              <a:t>Unprocessed agricultural datasets contain individual farm metrics but fail to explicitly communicate seasonal patterns, performance bottlenecks, or comparative economic viability.</a:t>
             </a:r>
           </a:p>
           <a:p>
             <a:pPr>
               <a:spcAft>
-                <a:spcPts val="400"/>
+                <a:spcPts val="1200"/>
               </a:spcAft>
-              <a:defRPr sz="1400"/>
+              <a:defRPr sz="1300">
+                <a:latin typeface="Segoe UI"/>
+              </a:defRPr>
             </a:pPr>
             <a:r>
-              <a:t>• Need to analyze 4,000 farm records to identify meaningful seasonal patterns and trends</a:t>
+              <a:rPr b="1">
+                <a:solidFill>
+                  <a:srgbClr val="1E293B"/>
+                </a:solidFill>
+              </a:rPr>
+              <a:t>• Resource Misallocation: </a:t>
+            </a:r>
+            <a:r>
+              <a:rPr>
+                <a:solidFill>
+                  <a:srgbClr val="1E293B"/>
+                </a:solidFill>
+              </a:rPr>
+              <a:t>Without analytical visibility, farmers often follow static farming practices, resulting in excessive water consumption in dry seasons and severe crop losses during pest outbreaks.</a:t>
+            </a:r>
+          </a:p>
+        </p:txBody>
+      </p:sp>
+      <p:sp>
+        <p:nvSpPr>
+          <p:cNvPr id="19" name="Rounded Rectangle 18"/>
+          <p:cNvSpPr/>
+          <p:nvPr/>
+        </p:nvSpPr>
+        <p:spPr>
+          <a:xfrm>
+            <a:off x="6336792" y="1051560"/>
+            <a:ext cx="5120640" cy="5212080"/>
+          </a:xfrm>
+          <a:prstGeom prst="roundRect">
+            <a:avLst/>
+          </a:prstGeom>
+          <a:solidFill>
+            <a:srgbClr val="F8FAFC"/>
+          </a:solidFill>
+          <a:ln>
+            <a:solidFill>
+              <a:srgbClr val="CBD5E1"/>
+            </a:solidFill>
+          </a:ln>
+        </p:spPr>
+        <p:style>
+          <a:lnRef idx="1">
+            <a:schemeClr val="accent1"/>
+          </a:lnRef>
+          <a:fillRef idx="3">
+            <a:schemeClr val="accent1"/>
+          </a:fillRef>
+          <a:effectRef idx="2">
+            <a:schemeClr val="accent1"/>
+          </a:effectRef>
+          <a:fontRef idx="minor">
+            <a:schemeClr val="lt1"/>
+          </a:fontRef>
+        </p:style>
+        <p:txBody>
+          <a:bodyPr rtlCol="0" anchor="ctr" wrap="square" lIns="274320" rIns="274320" tIns="274320"/>
+          <a:lstStyle/>
+          <a:p>
+            <a:pPr algn="ctr">
+              <a:spcAft>
+                <a:spcPts val="1200"/>
+              </a:spcAft>
+              <a:defRPr sz="1700" b="1">
+                <a:solidFill>
+                  <a:srgbClr val="1B365D"/>
+                </a:solidFill>
+                <a:latin typeface="Segoe UI"/>
+              </a:defRPr>
+            </a:pPr>
+            <a:r>
+              <a:t>Analytical Objectives &amp; Value</a:t>
             </a:r>
           </a:p>
           <a:p>
             <a:pPr>
               <a:spcAft>
-                <a:spcPts val="400"/>
+                <a:spcPts val="1000"/>
               </a:spcAft>
-              <a:defRPr sz="1400"/>
+              <a:defRPr sz="1300">
+                <a:latin typeface="Segoe UI"/>
+              </a:defRPr>
             </a:pPr>
             <a:r>
-              <a:t>• Investigate relationships between environmental conditions and agricultural outcomes</a:t>
+              <a:rPr b="1">
+                <a:solidFill>
+                  <a:srgbClr val="1E293B"/>
+                </a:solidFill>
+              </a:rPr>
+              <a:t>• Quantify Seasonal Performance: </a:t>
+            </a:r>
+            <a:r>
+              <a:rPr>
+                <a:solidFill>
+                  <a:srgbClr val="1E293B"/>
+                </a:solidFill>
+              </a:rPr>
+              <a:t>Examine 4,000 farm records to measure and compare average yield, total production, and net financial profitability across all three cropping seasons.</a:t>
             </a:r>
           </a:p>
           <a:p>
             <a:pPr>
               <a:spcAft>
-                <a:spcPts val="400"/>
+                <a:spcPts val="1000"/>
               </a:spcAft>
-              <a:defRPr sz="1400"/>
+              <a:defRPr sz="1300">
+                <a:latin typeface="Segoe UI"/>
+              </a:defRPr>
             </a:pPr>
             <a:r>
-              <a:t>• Compare performance across seasons, crops, and irrigation methods</a:t>
+              <a:rPr b="1">
+                <a:solidFill>
+                  <a:srgbClr val="1E293B"/>
+                </a:solidFill>
+              </a:rPr>
+              <a:t>• Evaluate Irrigation &amp; Water Use: </a:t>
+            </a:r>
+            <a:r>
+              <a:rPr>
+                <a:solidFill>
+                  <a:srgbClr val="1E293B"/>
+                </a:solidFill>
+              </a:rPr>
+              <a:t>Determine water efficiency across irrigation methods (Drip, Flood, Rainfed, Sprinkler) to establish optimal water management strategies.</a:t>
             </a:r>
           </a:p>
           <a:p>
             <a:pPr>
               <a:spcAft>
-                <a:spcPts val="400"/>
+                <a:spcPts val="1000"/>
               </a:spcAft>
-              <a:defRPr sz="1400"/>
+              <a:defRPr sz="1300">
+                <a:latin typeface="Segoe UI"/>
+              </a:defRPr>
             </a:pPr>
             <a:r>
-              <a:t>• Generate evidence-based findings and practical recommendations</a:t>
+              <a:rPr b="1">
+                <a:solidFill>
+                  <a:srgbClr val="1E293B"/>
+                </a:solidFill>
+              </a:rPr>
+              <a:t>• Assess Environmental &amp; Pest Risks: </a:t>
+            </a:r>
+            <a:r>
+              <a:rPr>
+                <a:solidFill>
+                  <a:srgbClr val="1E293B"/>
+                </a:solidFill>
+              </a:rPr>
+              <a:t>Investigate correlations between seasonal climate variables (rainfall, temperature, humidity) and pest/disease outbreak vulnerabilities.</a:t>
+            </a:r>
+          </a:p>
+          <a:p>
+            <a:pPr>
+              <a:spcAft>
+                <a:spcPts val="1000"/>
+              </a:spcAft>
+              <a:defRPr sz="1300">
+                <a:latin typeface="Segoe UI"/>
+              </a:defRPr>
+            </a:pPr>
+            <a:r>
+              <a:rPr b="1">
+                <a:solidFill>
+                  <a:srgbClr val="1E293B"/>
+                </a:solidFill>
+              </a:rPr>
+              <a:t>• Deliver Evidence-Based Planning: </a:t>
+            </a:r>
+            <a:r>
+              <a:rPr>
+                <a:solidFill>
+                  <a:srgbClr val="1E293B"/>
+                </a:solidFill>
+              </a:rPr>
+              <a:t>Translate analytical findings into actionable recommendations for farmers, agronomists, and policy planners to improve agricultural sustainability.</a:t>
             </a:r>
           </a:p>
         </p:txBody>
@@ -14272,16 +15708,18 @@
         <p:spPr>
           <a:xfrm>
             <a:off x="0" y="0"/>
-            <a:ext cx="12192000" cy="731520"/>
+            <a:ext cx="12191999" cy="731520"/>
           </a:xfrm>
           <a:prstGeom prst="rect">
             <a:avLst/>
           </a:prstGeom>
           <a:solidFill>
-            <a:srgbClr val="E63946"/>
+            <a:srgbClr val="1B365D"/>
           </a:solidFill>
           <a:ln>
-            <a:noFill/>
+            <a:solidFill>
+              <a:srgbClr val="1B365D"/>
+            </a:solidFill>
           </a:ln>
         </p:spPr>
         <p:style>
@@ -14299,159 +15737,369 @@
           </a:fontRef>
         </p:style>
         <p:txBody>
-          <a:bodyPr rtlCol="0" anchor="ctr" wrap="square" lIns="457200"/>
+          <a:bodyPr rtlCol="0" anchor="ctr" wrap="square"/>
           <a:lstStyle/>
           <a:p>
-            <a:pPr algn="l">
-              <a:defRPr sz="2400" b="1">
+            <a:pPr algn="ctr">
+              <a:defRPr sz="2200" b="1">
                 <a:solidFill>
                   <a:srgbClr val="FFFFFF"/>
                 </a:solidFill>
+                <a:latin typeface="Segoe UI"/>
               </a:defRPr>
             </a:pPr>
             <a:r>
-              <a:t>  Project Description</a:t>
+              <a:t>   Project Description &amp; Methodology</a:t>
             </a:r>
           </a:p>
         </p:txBody>
       </p:sp>
       <p:sp>
         <p:nvSpPr>
-          <p:cNvPr id="11" name="TextBox 10"/>
-          <p:cNvSpPr txBox="1"/>
+          <p:cNvPr id="11" name="Rounded Rectangle 10"/>
+          <p:cNvSpPr/>
           <p:nvPr/>
         </p:nvSpPr>
         <p:spPr>
           <a:xfrm>
-            <a:off x="457200" y="1097280"/>
-            <a:ext cx="8229600" cy="3840480"/>
+            <a:off x="731520" y="1051560"/>
+            <a:ext cx="5120640" cy="5212080"/>
           </a:xfrm>
-          <a:prstGeom prst="rect">
+          <a:prstGeom prst="roundRect">
             <a:avLst/>
           </a:prstGeom>
-          <a:noFill/>
+          <a:solidFill>
+            <a:srgbClr val="F8FAFC"/>
+          </a:solidFill>
+          <a:ln>
+            <a:solidFill>
+              <a:srgbClr val="CBD5E1"/>
+            </a:solidFill>
+          </a:ln>
         </p:spPr>
+        <p:style>
+          <a:lnRef idx="1">
+            <a:schemeClr val="accent1"/>
+          </a:lnRef>
+          <a:fillRef idx="3">
+            <a:schemeClr val="accent1"/>
+          </a:fillRef>
+          <a:effectRef idx="2">
+            <a:schemeClr val="accent1"/>
+          </a:effectRef>
+          <a:fontRef idx="minor">
+            <a:schemeClr val="lt1"/>
+          </a:fontRef>
+        </p:style>
         <p:txBody>
-          <a:bodyPr wrap="square">
-            <a:spAutoFit/>
-          </a:bodyPr>
+          <a:bodyPr rtlCol="0" anchor="ctr" wrap="square" lIns="274320" tIns="274320"/>
           <a:lstStyle/>
+          <a:p>
+            <a:pPr algn="ctr">
+              <a:spcAft>
+                <a:spcPts val="1000"/>
+              </a:spcAft>
+              <a:defRPr sz="1700" b="1">
+                <a:solidFill>
+                  <a:srgbClr val="1B365D"/>
+                </a:solidFill>
+                <a:latin typeface="Segoe UI"/>
+              </a:defRPr>
+            </a:pPr>
+            <a:r>
+              <a:t>Dataset Scope &amp; Coverage</a:t>
+            </a:r>
+          </a:p>
           <a:p>
             <a:pPr>
               <a:spcAft>
-                <a:spcPts val="400"/>
+                <a:spcPts val="1000"/>
               </a:spcAft>
-              <a:defRPr sz="1300"/>
+              <a:defRPr sz="1300">
+                <a:latin typeface="Segoe UI"/>
+              </a:defRPr>
             </a:pPr>
             <a:r>
-              <a:t>Scope:</a:t>
+              <a:rPr b="1">
+                <a:solidFill>
+                  <a:srgbClr val="1E293B"/>
+                </a:solidFill>
+              </a:rPr>
+              <a:t>• Sample Size: </a:t>
+            </a:r>
+            <a:r>
+              <a:rPr>
+                <a:solidFill>
+                  <a:srgbClr val="1E293B"/>
+                </a:solidFill>
+              </a:rPr>
+              <a:t>4,000 agricultural farm records spanning 8 Indian states (AP, Gujarat, Karnataka, MP, Maharashtra, Punjab, TN, Telangana) and 10 districts.</a:t>
             </a:r>
           </a:p>
           <a:p>
             <a:pPr>
               <a:spcAft>
-                <a:spcPts val="400"/>
+                <a:spcPts val="1000"/>
               </a:spcAft>
-              <a:defRPr sz="1300"/>
+              <a:defRPr sz="1300">
+                <a:latin typeface="Segoe UI"/>
+              </a:defRPr>
             </a:pPr>
             <a:r>
-              <a:t>• Analysis of 4,000 agricultural records across 3 seasons (Kharif, Rabi, Zaid)</a:t>
+              <a:rPr b="1">
+                <a:solidFill>
+                  <a:srgbClr val="1E293B"/>
+                </a:solidFill>
+              </a:rPr>
+              <a:t>• Seasonal Distribution: </a:t>
+            </a:r>
+            <a:r>
+              <a:rPr>
+                <a:solidFill>
+                  <a:srgbClr val="1E293B"/>
+                </a:solidFill>
+              </a:rPr>
+              <a:t>Kharif: 1,779 farms (44.5%) | Rabi: 1,627 farms (40.7%) | Zaid: 594 farms (14.8%).</a:t>
             </a:r>
           </a:p>
           <a:p>
             <a:pPr>
               <a:spcAft>
-                <a:spcPts val="400"/>
+                <a:spcPts val="1000"/>
               </a:spcAft>
-              <a:defRPr sz="1300"/>
+              <a:defRPr sz="1300">
+                <a:latin typeface="Segoe UI"/>
+              </a:defRPr>
             </a:pPr>
             <a:r>
-              <a:t>• 8 crops, 8 states, 10 districts, 4 irrigation methods</a:t>
+              <a:rPr b="1">
+                <a:solidFill>
+                  <a:srgbClr val="1E293B"/>
+                </a:solidFill>
+              </a:rPr>
+              <a:t>• Crop Representation: </a:t>
+            </a:r>
+            <a:r>
+              <a:rPr>
+                <a:solidFill>
+                  <a:srgbClr val="1E293B"/>
+                </a:solidFill>
+              </a:rPr>
+              <a:t>8 distinct crops analyzed across food grains, pulses, and commercial crops: Chilli, Cotton, Groundnut, Maize, Pulses, Rice, Sugarcane, Wheat.</a:t>
             </a:r>
           </a:p>
           <a:p>
             <a:pPr>
               <a:spcAft>
-                <a:spcPts val="400"/>
+                <a:spcPts val="1000"/>
               </a:spcAft>
-              <a:defRPr sz="1300"/>
+              <a:defRPr sz="1300">
+                <a:latin typeface="Segoe UI"/>
+              </a:defRPr>
             </a:pPr>
             <a:r>
-              <a:t>• 28 variables covering environment, farming, economics, and risk</a:t>
+              <a:rPr b="1">
+                <a:solidFill>
+                  <a:srgbClr val="1E293B"/>
+                </a:solidFill>
+              </a:rPr>
+              <a:t>• Variables (28 Features): </a:t>
+            </a:r>
+            <a:r>
+              <a:rPr>
+                <a:solidFill>
+                  <a:srgbClr val="1E293B"/>
+                </a:solidFill>
+              </a:rPr>
+              <a:t>Covers environmental indicators (rainfall, temp, humidity), soil nutrients (N, P, K, pH), farming inputs (fertilizer, pesticide, irrigation), and financial metrics (cost, revenue, profit).</a:t>
+            </a:r>
+          </a:p>
+        </p:txBody>
+      </p:sp>
+      <p:sp>
+        <p:nvSpPr>
+          <p:cNvPr id="12" name="Rounded Rectangle 11"/>
+          <p:cNvSpPr/>
+          <p:nvPr/>
+        </p:nvSpPr>
+        <p:spPr>
+          <a:xfrm>
+            <a:off x="6336792" y="1051560"/>
+            <a:ext cx="5120640" cy="5212080"/>
+          </a:xfrm>
+          <a:prstGeom prst="roundRect">
+            <a:avLst/>
+          </a:prstGeom>
+          <a:solidFill>
+            <a:srgbClr val="F8FAFC"/>
+          </a:solidFill>
+          <a:ln>
+            <a:solidFill>
+              <a:srgbClr val="CBD5E1"/>
+            </a:solidFill>
+          </a:ln>
+        </p:spPr>
+        <p:style>
+          <a:lnRef idx="1">
+            <a:schemeClr val="accent1"/>
+          </a:lnRef>
+          <a:fillRef idx="3">
+            <a:schemeClr val="accent1"/>
+          </a:fillRef>
+          <a:effectRef idx="2">
+            <a:schemeClr val="accent1"/>
+          </a:effectRef>
+          <a:fontRef idx="minor">
+            <a:schemeClr val="lt1"/>
+          </a:fontRef>
+        </p:style>
+        <p:txBody>
+          <a:bodyPr rtlCol="0" anchor="ctr" wrap="square" lIns="274320" tIns="274320"/>
+          <a:lstStyle/>
+          <a:p>
+            <a:pPr algn="ctr">
+              <a:spcAft>
+                <a:spcPts val="1000"/>
+              </a:spcAft>
+              <a:defRPr sz="1700" b="1">
+                <a:solidFill>
+                  <a:srgbClr val="1B365D"/>
+                </a:solidFill>
+                <a:latin typeface="Segoe UI"/>
+              </a:defRPr>
+            </a:pPr>
+            <a:r>
+              <a:t>5-Stage Analytical Framework</a:t>
             </a:r>
           </a:p>
           <a:p>
             <a:pPr>
               <a:spcAft>
-                <a:spcPts val="400"/>
+                <a:spcPts val="800"/>
               </a:spcAft>
-              <a:defRPr sz="1300"/>
+              <a:defRPr sz="1300">
+                <a:latin typeface="Segoe UI"/>
+              </a:defRPr>
             </a:pPr>
+            <a:r>
+              <a:rPr b="1">
+                <a:solidFill>
+                  <a:srgbClr val="1E293B"/>
+                </a:solidFill>
+              </a:rPr>
+              <a:t>• 1. Data Auditing &amp; Cleaning: </a:t>
+            </a:r>
+            <a:r>
+              <a:rPr>
+                <a:solidFill>
+                  <a:srgbClr val="1E293B"/>
+                </a:solidFill>
+              </a:rPr>
+              <a:t>Verified data types, identified zero duplicate rows, detected 120 missing values across 3 variables, and applied robust median imputation.</a:t>
+            </a:r>
           </a:p>
           <a:p>
             <a:pPr>
               <a:spcAft>
-                <a:spcPts val="400"/>
+                <a:spcPts val="800"/>
               </a:spcAft>
-              <a:defRPr sz="1300"/>
+              <a:defRPr sz="1300">
+                <a:latin typeface="Segoe UI"/>
+              </a:defRPr>
             </a:pPr>
             <a:r>
-              <a:t>Approach:</a:t>
+              <a:rPr b="1">
+                <a:solidFill>
+                  <a:srgbClr val="1E293B"/>
+                </a:solidFill>
+              </a:rPr>
+              <a:t>• 2. Exploratory Data Analysis: </a:t>
+            </a:r>
+            <a:r>
+              <a:rPr>
+                <a:solidFill>
+                  <a:srgbClr val="1E293B"/>
+                </a:solidFill>
+              </a:rPr>
+              <a:t>Conducted univariate and bivariate aggregations across seasons, crop types, and irrigation categories to evaluate production patterns.</a:t>
             </a:r>
           </a:p>
           <a:p>
             <a:pPr>
               <a:spcAft>
-                <a:spcPts val="400"/>
+                <a:spcPts val="800"/>
               </a:spcAft>
-              <a:defRPr sz="1300"/>
+              <a:defRPr sz="1300">
+                <a:latin typeface="Segoe UI"/>
+              </a:defRPr>
             </a:pPr>
             <a:r>
-              <a:t>• Data Understanding → Data Cleaning → Exploratory Analysis</a:t>
+              <a:rPr b="1">
+                <a:solidFill>
+                  <a:srgbClr val="1E293B"/>
+                </a:solidFill>
+              </a:rPr>
+              <a:t>• 3. Environmental &amp; Risk Analysis: </a:t>
+            </a:r>
+            <a:r>
+              <a:rPr>
+                <a:solidFill>
+                  <a:srgbClr val="1E293B"/>
+                </a:solidFill>
+              </a:rPr>
+              <a:t>Evaluated temperature, sunlight, and rainfall dynamics in relation to pest risk and overall yield output.</a:t>
             </a:r>
           </a:p>
           <a:p>
             <a:pPr>
               <a:spcAft>
-                <a:spcPts val="400"/>
+                <a:spcPts val="800"/>
               </a:spcAft>
-              <a:defRPr sz="1300"/>
+              <a:defRPr sz="1300">
+                <a:latin typeface="Segoe UI"/>
+              </a:defRPr>
             </a:pPr>
             <a:r>
-              <a:t>• Season-wise, Crop-wise, Environmental, and Irrigation analysis</a:t>
+              <a:rPr b="1">
+                <a:solidFill>
+                  <a:srgbClr val="1E293B"/>
+                </a:solidFill>
+              </a:rPr>
+              <a:t>• 4. Correlation &amp; Economic Modeling: </a:t>
+            </a:r>
+            <a:r>
+              <a:rPr>
+                <a:solidFill>
+                  <a:srgbClr val="1E293B"/>
+                </a:solidFill>
+              </a:rPr>
+              <a:t>Computed full Pearson correlation matrix; assessed revenue, operating cost, and net profit margins per season and crop.</a:t>
             </a:r>
           </a:p>
           <a:p>
             <a:pPr>
               <a:spcAft>
-                <a:spcPts val="400"/>
+                <a:spcPts val="800"/>
               </a:spcAft>
-              <a:defRPr sz="1300"/>
+              <a:defRPr sz="1300">
+                <a:latin typeface="Segoe UI"/>
+              </a:defRPr>
             </a:pPr>
             <a:r>
-              <a:t>• Statistical analysis and correlation study</a:t>
-            </a:r>
-          </a:p>
-          <a:p>
-            <a:pPr>
-              <a:spcAft>
-                <a:spcPts val="400"/>
-              </a:spcAft>
-              <a:defRPr sz="1300"/>
-            </a:pPr>
-            <a:r>
-              <a:t>• 12 visualizations covering all key dimensions</a:t>
-            </a:r>
-          </a:p>
-          <a:p>
-            <a:pPr>
-              <a:spcAft>
-                <a:spcPts val="400"/>
-              </a:spcAft>
-              <a:defRPr sz="1300"/>
-            </a:pPr>
-            <a:r>
-              <a:t>• Evidence-based findings and recommendations</a:t>
+              <a:rPr b="1">
+                <a:solidFill>
+                  <a:srgbClr val="1E293B"/>
+                </a:solidFill>
+              </a:rPr>
+              <a:t>• 5. Insights &amp; Recommendations: </a:t>
+            </a:r>
+            <a:r>
+              <a:rPr>
+                <a:solidFill>
+                  <a:srgbClr val="1E293B"/>
+                </a:solidFill>
+              </a:rPr>
+              <a:t>Synthesized statistical findings into 5 actionable strategic recommendation areas for stakeholders.</a:t>
             </a:r>
           </a:p>
         </p:txBody>
@@ -14627,16 +16275,18 @@
         <p:spPr>
           <a:xfrm>
             <a:off x="0" y="0"/>
-            <a:ext cx="12192000" cy="731520"/>
+            <a:ext cx="12191999" cy="731520"/>
           </a:xfrm>
           <a:prstGeom prst="rect">
             <a:avLst/>
           </a:prstGeom>
           <a:solidFill>
-            <a:srgbClr val="E63946"/>
+            <a:srgbClr val="1B365D"/>
           </a:solidFill>
           <a:ln>
-            <a:noFill/>
+            <a:solidFill>
+              <a:srgbClr val="1B365D"/>
+            </a:solidFill>
           </a:ln>
         </p:spPr>
         <p:style>
@@ -14654,147 +16304,445 @@
           </a:fontRef>
         </p:style>
         <p:txBody>
-          <a:bodyPr rtlCol="0" anchor="ctr" wrap="square" lIns="457200"/>
+          <a:bodyPr rtlCol="0" anchor="ctr" wrap="square"/>
           <a:lstStyle/>
           <a:p>
-            <a:pPr algn="l">
-              <a:defRPr sz="2400" b="1">
+            <a:pPr algn="ctr">
+              <a:defRPr sz="2200" b="1">
                 <a:solidFill>
                   <a:srgbClr val="FFFFFF"/>
                 </a:solidFill>
+                <a:latin typeface="Segoe UI"/>
               </a:defRPr>
             </a:pPr>
             <a:r>
-              <a:t>  End Users</a:t>
+              <a:t>   Target End Users &amp; Stakeholder Value</a:t>
             </a:r>
           </a:p>
         </p:txBody>
       </p:sp>
       <p:sp>
         <p:nvSpPr>
-          <p:cNvPr id="18" name="TextBox 17"/>
-          <p:cNvSpPr txBox="1"/>
+          <p:cNvPr id="18" name="Rounded Rectangle 17"/>
+          <p:cNvSpPr/>
           <p:nvPr/>
         </p:nvSpPr>
         <p:spPr>
           <a:xfrm>
-            <a:off x="457200" y="1097280"/>
-            <a:ext cx="8229600" cy="3840480"/>
+            <a:off x="731520" y="1051560"/>
+            <a:ext cx="5120640" cy="1600200"/>
           </a:xfrm>
-          <a:prstGeom prst="rect">
+          <a:prstGeom prst="roundRect">
             <a:avLst/>
           </a:prstGeom>
-          <a:noFill/>
+          <a:solidFill>
+            <a:srgbClr val="F8FAFC"/>
+          </a:solidFill>
+          <a:ln>
+            <a:solidFill>
+              <a:srgbClr val="CBD5E1"/>
+            </a:solidFill>
+          </a:ln>
         </p:spPr>
+        <p:style>
+          <a:lnRef idx="1">
+            <a:schemeClr val="accent1"/>
+          </a:lnRef>
+          <a:fillRef idx="3">
+            <a:schemeClr val="accent1"/>
+          </a:fillRef>
+          <a:effectRef idx="2">
+            <a:schemeClr val="accent1"/>
+          </a:effectRef>
+          <a:fontRef idx="minor">
+            <a:schemeClr val="lt1"/>
+          </a:fontRef>
+        </p:style>
         <p:txBody>
-          <a:bodyPr wrap="square">
-            <a:spAutoFit/>
-          </a:bodyPr>
+          <a:bodyPr rtlCol="0" anchor="ctr" wrap="square" lIns="228600" tIns="182880" rIns="228600"/>
           <a:lstStyle/>
           <a:p>
-            <a:pPr>
+            <a:pPr algn="ctr">
               <a:spcAft>
                 <a:spcPts val="400"/>
               </a:spcAft>
-              <a:defRPr sz="1400"/>
+              <a:defRPr sz="1500" b="1">
+                <a:solidFill>
+                  <a:srgbClr val="1B365D"/>
+                </a:solidFill>
+                <a:latin typeface="Segoe UI"/>
+              </a:defRPr>
             </a:pPr>
             <a:r>
-              <a:t>👨‍🌾  Farmers — Seasonal crop planning and resource optimization</a:t>
+              <a:t>Farmers &amp; Farm Producers</a:t>
             </a:r>
           </a:p>
           <a:p>
             <a:pPr>
+              <a:defRPr sz="1200">
+                <a:solidFill>
+                  <a:srgbClr val="1E293B"/>
+                </a:solidFill>
+                <a:latin typeface="Segoe UI"/>
+              </a:defRPr>
+            </a:pPr>
+            <a:r>
+              <a:t>Guide seasonal crop selection, manage input costs (fertilizers, pesticides), and adopt efficient irrigation scheduling to protect margins during high-risk seasons.</a:t>
+            </a:r>
+          </a:p>
+        </p:txBody>
+      </p:sp>
+      <p:sp>
+        <p:nvSpPr>
+          <p:cNvPr id="19" name="Rounded Rectangle 18"/>
+          <p:cNvSpPr/>
+          <p:nvPr/>
+        </p:nvSpPr>
+        <p:spPr>
+          <a:xfrm>
+            <a:off x="731520" y="2834640"/>
+            <a:ext cx="5120640" cy="1600200"/>
+          </a:xfrm>
+          <a:prstGeom prst="roundRect">
+            <a:avLst/>
+          </a:prstGeom>
+          <a:solidFill>
+            <a:srgbClr val="F8FAFC"/>
+          </a:solidFill>
+          <a:ln>
+            <a:solidFill>
+              <a:srgbClr val="CBD5E1"/>
+            </a:solidFill>
+          </a:ln>
+        </p:spPr>
+        <p:style>
+          <a:lnRef idx="1">
+            <a:schemeClr val="accent1"/>
+          </a:lnRef>
+          <a:fillRef idx="3">
+            <a:schemeClr val="accent1"/>
+          </a:fillRef>
+          <a:effectRef idx="2">
+            <a:schemeClr val="accent1"/>
+          </a:effectRef>
+          <a:fontRef idx="minor">
+            <a:schemeClr val="lt1"/>
+          </a:fontRef>
+        </p:style>
+        <p:txBody>
+          <a:bodyPr rtlCol="0" anchor="ctr" wrap="square" lIns="228600" tIns="182880" rIns="228600"/>
+          <a:lstStyle/>
+          <a:p>
+            <a:pPr algn="ctr">
               <a:spcAft>
                 <a:spcPts val="400"/>
               </a:spcAft>
-              <a:defRPr sz="1400"/>
+              <a:defRPr sz="1500" b="1">
+                <a:solidFill>
+                  <a:srgbClr val="1B365D"/>
+                </a:solidFill>
+                <a:latin typeface="Segoe UI"/>
+              </a:defRPr>
             </a:pPr>
+            <a:r>
+              <a:t>Agricultural Policy Planners</a:t>
+            </a:r>
           </a:p>
           <a:p>
             <a:pPr>
+              <a:defRPr sz="1200">
+                <a:solidFill>
+                  <a:srgbClr val="1E293B"/>
+                </a:solidFill>
+                <a:latin typeface="Segoe UI"/>
+              </a:defRPr>
+            </a:pPr>
+            <a:r>
+              <a:t>Design evidence-based crop insurance schemes, regional subsidy allocations, and minimum support price policies calibrated to seasonal volatility.</a:t>
+            </a:r>
+          </a:p>
+        </p:txBody>
+      </p:sp>
+      <p:sp>
+        <p:nvSpPr>
+          <p:cNvPr id="20" name="Rounded Rectangle 19"/>
+          <p:cNvSpPr/>
+          <p:nvPr/>
+        </p:nvSpPr>
+        <p:spPr>
+          <a:xfrm>
+            <a:off x="731520" y="4617720"/>
+            <a:ext cx="5120640" cy="1600200"/>
+          </a:xfrm>
+          <a:prstGeom prst="roundRect">
+            <a:avLst/>
+          </a:prstGeom>
+          <a:solidFill>
+            <a:srgbClr val="F8FAFC"/>
+          </a:solidFill>
+          <a:ln>
+            <a:solidFill>
+              <a:srgbClr val="CBD5E1"/>
+            </a:solidFill>
+          </a:ln>
+        </p:spPr>
+        <p:style>
+          <a:lnRef idx="1">
+            <a:schemeClr val="accent1"/>
+          </a:lnRef>
+          <a:fillRef idx="3">
+            <a:schemeClr val="accent1"/>
+          </a:fillRef>
+          <a:effectRef idx="2">
+            <a:schemeClr val="accent1"/>
+          </a:effectRef>
+          <a:fontRef idx="minor">
+            <a:schemeClr val="lt1"/>
+          </a:fontRef>
+        </p:style>
+        <p:txBody>
+          <a:bodyPr rtlCol="0" anchor="ctr" wrap="square" lIns="228600" tIns="182880" rIns="228600"/>
+          <a:lstStyle/>
+          <a:p>
+            <a:pPr algn="ctr">
               <a:spcAft>
                 <a:spcPts val="400"/>
               </a:spcAft>
-              <a:defRPr sz="1400"/>
+              <a:defRPr sz="1500" b="1">
+                <a:solidFill>
+                  <a:srgbClr val="1B365D"/>
+                </a:solidFill>
+                <a:latin typeface="Segoe UI"/>
+              </a:defRPr>
             </a:pPr>
             <a:r>
-              <a:t>🏛️  Agricultural Planners — Evidence-based policy and planning</a:t>
+              <a:t>Irrigation &amp; Water Authorities</a:t>
             </a:r>
           </a:p>
           <a:p>
             <a:pPr>
+              <a:defRPr sz="1200">
+                <a:solidFill>
+                  <a:srgbClr val="1E293B"/>
+                </a:solidFill>
+                <a:latin typeface="Segoe UI"/>
+              </a:defRPr>
+            </a:pPr>
+            <a:r>
+              <a:t>Identify water-efficient irrigation methods (such as drip) to optimize canal water distribution during water-scarce summer (Zaid) periods.</a:t>
+            </a:r>
+          </a:p>
+        </p:txBody>
+      </p:sp>
+      <p:sp>
+        <p:nvSpPr>
+          <p:cNvPr id="21" name="Rounded Rectangle 20"/>
+          <p:cNvSpPr/>
+          <p:nvPr/>
+        </p:nvSpPr>
+        <p:spPr>
+          <a:xfrm>
+            <a:off x="6336792" y="1051560"/>
+            <a:ext cx="5120640" cy="1600200"/>
+          </a:xfrm>
+          <a:prstGeom prst="roundRect">
+            <a:avLst/>
+          </a:prstGeom>
+          <a:solidFill>
+            <a:srgbClr val="F8FAFC"/>
+          </a:solidFill>
+          <a:ln>
+            <a:solidFill>
+              <a:srgbClr val="CBD5E1"/>
+            </a:solidFill>
+          </a:ln>
+        </p:spPr>
+        <p:style>
+          <a:lnRef idx="1">
+            <a:schemeClr val="accent1"/>
+          </a:lnRef>
+          <a:fillRef idx="3">
+            <a:schemeClr val="accent1"/>
+          </a:fillRef>
+          <a:effectRef idx="2">
+            <a:schemeClr val="accent1"/>
+          </a:effectRef>
+          <a:fontRef idx="minor">
+            <a:schemeClr val="lt1"/>
+          </a:fontRef>
+        </p:style>
+        <p:txBody>
+          <a:bodyPr rtlCol="0" anchor="ctr" wrap="square" lIns="228600" tIns="182880" rIns="228600"/>
+          <a:lstStyle/>
+          <a:p>
+            <a:pPr algn="ctr">
               <a:spcAft>
                 <a:spcPts val="400"/>
               </a:spcAft>
-              <a:defRPr sz="1400"/>
+              <a:defRPr sz="1500" b="1">
+                <a:solidFill>
+                  <a:srgbClr val="1B365D"/>
+                </a:solidFill>
+                <a:latin typeface="Segoe UI"/>
+              </a:defRPr>
             </a:pPr>
+            <a:r>
+              <a:t>Agronomists &amp; Researchers</a:t>
+            </a:r>
           </a:p>
           <a:p>
             <a:pPr>
+              <a:defRPr sz="1200">
+                <a:solidFill>
+                  <a:srgbClr val="1E293B"/>
+                </a:solidFill>
+                <a:latin typeface="Segoe UI"/>
+              </a:defRPr>
+            </a:pPr>
+            <a:r>
+              <a:t>Analyze empirical interactions between climate variables, disease/pest risk, and soil chemistry to develop resilient agricultural models.</a:t>
+            </a:r>
+          </a:p>
+        </p:txBody>
+      </p:sp>
+      <p:sp>
+        <p:nvSpPr>
+          <p:cNvPr id="22" name="Rounded Rectangle 21"/>
+          <p:cNvSpPr/>
+          <p:nvPr/>
+        </p:nvSpPr>
+        <p:spPr>
+          <a:xfrm>
+            <a:off x="6336792" y="2834640"/>
+            <a:ext cx="5120640" cy="1600200"/>
+          </a:xfrm>
+          <a:prstGeom prst="roundRect">
+            <a:avLst/>
+          </a:prstGeom>
+          <a:solidFill>
+            <a:srgbClr val="F8FAFC"/>
+          </a:solidFill>
+          <a:ln>
+            <a:solidFill>
+              <a:srgbClr val="CBD5E1"/>
+            </a:solidFill>
+          </a:ln>
+        </p:spPr>
+        <p:style>
+          <a:lnRef idx="1">
+            <a:schemeClr val="accent1"/>
+          </a:lnRef>
+          <a:fillRef idx="3">
+            <a:schemeClr val="accent1"/>
+          </a:fillRef>
+          <a:effectRef idx="2">
+            <a:schemeClr val="accent1"/>
+          </a:effectRef>
+          <a:fontRef idx="minor">
+            <a:schemeClr val="lt1"/>
+          </a:fontRef>
+        </p:style>
+        <p:txBody>
+          <a:bodyPr rtlCol="0" anchor="ctr" wrap="square" lIns="228600" tIns="182880" rIns="228600"/>
+          <a:lstStyle/>
+          <a:p>
+            <a:pPr algn="ctr">
               <a:spcAft>
                 <a:spcPts val="400"/>
               </a:spcAft>
-              <a:defRPr sz="1400"/>
+              <a:defRPr sz="1500" b="1">
+                <a:solidFill>
+                  <a:srgbClr val="1B365D"/>
+                </a:solidFill>
+                <a:latin typeface="Segoe UI"/>
+              </a:defRPr>
             </a:pPr>
             <a:r>
-              <a:t>📊  Data Analysts — Analytical framework for agricultural data</a:t>
+              <a:t>Agribusiness &amp; Financial Analysts</a:t>
             </a:r>
           </a:p>
           <a:p>
             <a:pPr>
+              <a:defRPr sz="1200">
+                <a:solidFill>
+                  <a:srgbClr val="1E293B"/>
+                </a:solidFill>
+                <a:latin typeface="Segoe UI"/>
+              </a:defRPr>
+            </a:pPr>
+            <a:r>
+              <a:t>Assess seasonal revenue risks, crop-specific profitability trends, and agricultural credit viability across commercial and staple crops.</a:t>
+            </a:r>
+          </a:p>
+        </p:txBody>
+      </p:sp>
+      <p:sp>
+        <p:nvSpPr>
+          <p:cNvPr id="23" name="Rounded Rectangle 22"/>
+          <p:cNvSpPr/>
+          <p:nvPr/>
+        </p:nvSpPr>
+        <p:spPr>
+          <a:xfrm>
+            <a:off x="6336792" y="4617720"/>
+            <a:ext cx="5120640" cy="1600200"/>
+          </a:xfrm>
+          <a:prstGeom prst="roundRect">
+            <a:avLst/>
+          </a:prstGeom>
+          <a:solidFill>
+            <a:srgbClr val="F8FAFC"/>
+          </a:solidFill>
+          <a:ln>
+            <a:solidFill>
+              <a:srgbClr val="CBD5E1"/>
+            </a:solidFill>
+          </a:ln>
+        </p:spPr>
+        <p:style>
+          <a:lnRef idx="1">
+            <a:schemeClr val="accent1"/>
+          </a:lnRef>
+          <a:fillRef idx="3">
+            <a:schemeClr val="accent1"/>
+          </a:fillRef>
+          <a:effectRef idx="2">
+            <a:schemeClr val="accent1"/>
+          </a:effectRef>
+          <a:fontRef idx="minor">
+            <a:schemeClr val="lt1"/>
+          </a:fontRef>
+        </p:style>
+        <p:txBody>
+          <a:bodyPr rtlCol="0" anchor="ctr" wrap="square" lIns="228600" tIns="182880" rIns="228600"/>
+          <a:lstStyle/>
+          <a:p>
+            <a:pPr algn="ctr">
               <a:spcAft>
                 <a:spcPts val="400"/>
               </a:spcAft>
-              <a:defRPr sz="1400"/>
+              <a:defRPr sz="1500" b="1">
+                <a:solidFill>
+                  <a:srgbClr val="1B365D"/>
+                </a:solidFill>
+                <a:latin typeface="Segoe UI"/>
+              </a:defRPr>
             </a:pPr>
+            <a:r>
+              <a:t>Data Analytics Students &amp; Educators</a:t>
+            </a:r>
           </a:p>
           <a:p>
             <a:pPr>
-              <a:spcAft>
-                <a:spcPts val="400"/>
-              </a:spcAft>
-              <a:defRPr sz="1400"/>
+              <a:defRPr sz="1200">
+                <a:solidFill>
+                  <a:srgbClr val="1E293B"/>
+                </a:solidFill>
+                <a:latin typeface="Segoe UI"/>
+              </a:defRPr>
             </a:pPr>
             <a:r>
-              <a:t>🔬  Researchers — Patterns and trends for further study</a:t>
-            </a:r>
-          </a:p>
-          <a:p>
-            <a:pPr>
-              <a:spcAft>
-                <a:spcPts val="400"/>
-              </a:spcAft>
-              <a:defRPr sz="1400"/>
-            </a:pPr>
-          </a:p>
-          <a:p>
-            <a:pPr>
-              <a:spcAft>
-                <a:spcPts val="400"/>
-              </a:spcAft>
-              <a:defRPr sz="1400"/>
-            </a:pPr>
-            <a:r>
-              <a:t>💧  Irrigation Departments — Water usage and efficiency insights</a:t>
-            </a:r>
-          </a:p>
-          <a:p>
-            <a:pPr>
-              <a:spcAft>
-                <a:spcPts val="400"/>
-              </a:spcAft>
-              <a:defRPr sz="1400"/>
-            </a:pPr>
-          </a:p>
-          <a:p>
-            <a:pPr>
-              <a:spcAft>
-                <a:spcPts val="400"/>
-              </a:spcAft>
-              <a:defRPr sz="1400"/>
-            </a:pPr>
-            <a:r>
-              <a:t>🎓  Students — Learning data analytics on a real-world dataset</a:t>
+              <a:t>Serve as a comprehensive benchmark case study for applied exploratory data analysis, hypothesis validation, and multivariate agricultural modeling.</a:t>
             </a:r>
           </a:p>
         </p:txBody>
@@ -15101,16 +17049,18 @@
         <p:spPr>
           <a:xfrm>
             <a:off x="0" y="0"/>
-            <a:ext cx="12192000" cy="731520"/>
+            <a:ext cx="12191999" cy="731520"/>
           </a:xfrm>
           <a:prstGeom prst="rect">
             <a:avLst/>
           </a:prstGeom>
           <a:solidFill>
-            <a:srgbClr val="E63946"/>
+            <a:srgbClr val="1B365D"/>
           </a:solidFill>
           <a:ln>
-            <a:noFill/>
+            <a:solidFill>
+              <a:srgbClr val="1B365D"/>
+            </a:solidFill>
           </a:ln>
         </p:spPr>
         <p:style>
@@ -15128,52 +17078,116 @@
           </a:fontRef>
         </p:style>
         <p:txBody>
-          <a:bodyPr rtlCol="0" anchor="ctr" wrap="square" lIns="457200"/>
+          <a:bodyPr rtlCol="0" anchor="ctr" wrap="square"/>
           <a:lstStyle/>
           <a:p>
-            <a:pPr algn="l">
-              <a:defRPr sz="2400" b="1">
+            <a:pPr algn="ctr">
+              <a:defRPr sz="2200" b="1">
                 <a:solidFill>
                   <a:srgbClr val="FFFFFF"/>
                 </a:solidFill>
+                <a:latin typeface="Segoe UI"/>
               </a:defRPr>
             </a:pPr>
             <a:r>
-              <a:t>  Technology Used</a:t>
+              <a:t>   Technology Stack &amp; Development Environment</a:t>
             </a:r>
           </a:p>
         </p:txBody>
       </p:sp>
       <p:sp>
         <p:nvSpPr>
-          <p:cNvPr id="18" name="TextBox 17"/>
-          <p:cNvSpPr txBox="1"/>
+          <p:cNvPr id="18" name="Rounded Rectangle 17"/>
+          <p:cNvSpPr/>
           <p:nvPr/>
         </p:nvSpPr>
         <p:spPr>
           <a:xfrm>
-            <a:off x="457200" y="1097280"/>
-            <a:ext cx="8229600" cy="3840480"/>
+            <a:off x="731520" y="1051560"/>
+            <a:ext cx="5120640" cy="2468880"/>
           </a:xfrm>
-          <a:prstGeom prst="rect">
+          <a:prstGeom prst="roundRect">
             <a:avLst/>
           </a:prstGeom>
-          <a:noFill/>
+          <a:solidFill>
+            <a:srgbClr val="F8FAFC"/>
+          </a:solidFill>
+          <a:ln>
+            <a:solidFill>
+              <a:srgbClr val="CBD5E1"/>
+            </a:solidFill>
+          </a:ln>
         </p:spPr>
+        <p:style>
+          <a:lnRef idx="1">
+            <a:schemeClr val="accent1"/>
+          </a:lnRef>
+          <a:fillRef idx="3">
+            <a:schemeClr val="accent1"/>
+          </a:fillRef>
+          <a:effectRef idx="2">
+            <a:schemeClr val="accent1"/>
+          </a:effectRef>
+          <a:fontRef idx="minor">
+            <a:schemeClr val="lt1"/>
+          </a:fontRef>
+        </p:style>
         <p:txBody>
-          <a:bodyPr wrap="square">
-            <a:spAutoFit/>
-          </a:bodyPr>
+          <a:bodyPr rtlCol="0" anchor="ctr" wrap="square" lIns="228600" tIns="228600" rIns="228600"/>
           <a:lstStyle/>
+          <a:p>
+            <a:pPr algn="ctr">
+              <a:defRPr sz="1600" b="1">
+                <a:solidFill>
+                  <a:srgbClr val="1B365D"/>
+                </a:solidFill>
+                <a:latin typeface="Segoe UI"/>
+              </a:defRPr>
+            </a:pPr>
+            <a:r>
+              <a:t>Programming &amp; Runtime</a:t>
+            </a:r>
+          </a:p>
+          <a:p>
+            <a:pPr>
+              <a:spcAft>
+                <a:spcPts val="800"/>
+              </a:spcAft>
+              <a:defRPr sz="1300" b="1">
+                <a:solidFill>
+                  <a:srgbClr val="475569"/>
+                </a:solidFill>
+                <a:latin typeface="Segoe UI"/>
+              </a:defRPr>
+            </a:pPr>
+            <a:r>
+              <a:t>Python 3.14</a:t>
+            </a:r>
+          </a:p>
           <a:p>
             <a:pPr>
               <a:spcAft>
                 <a:spcPts val="400"/>
               </a:spcAft>
-              <a:defRPr sz="1300"/>
+              <a:defRPr sz="1200">
+                <a:latin typeface="Segoe UI"/>
+              </a:defRPr>
             </a:pPr>
             <a:r>
-              <a:t>Programming Language:</a:t>
+              <a:rPr b="1">
+                <a:solidFill>
+                  <a:srgbClr val="1E293B"/>
+                </a:solidFill>
+              </a:rPr>
+              <a:t>• Core Language: </a:t>
+            </a:r>
+            <a:r>
+              <a:rPr>
+                <a:solidFill>
+                  <a:srgbClr val="1E293B"/>
+                </a:solidFill>
+              </a:rPr>
+              <a:t>Chosen for comprehensive scientific computing ecosystem, robust data manipulation, and wide industry adoption.</a:t>
             </a:r>
           </a:p>
           <a:p>
@@ -15181,10 +17195,96 @@
               <a:spcAft>
                 <a:spcPts val="400"/>
               </a:spcAft>
-              <a:defRPr sz="1300"/>
+              <a:defRPr sz="1200">
+                <a:latin typeface="Segoe UI"/>
+              </a:defRPr>
             </a:pPr>
             <a:r>
-              <a:t>  • Python 3</a:t>
+              <a:rPr b="1">
+                <a:solidFill>
+                  <a:srgbClr val="1E293B"/>
+                </a:solidFill>
+              </a:rPr>
+              <a:t>• Jupyter Notebook: </a:t>
+            </a:r>
+            <a:r>
+              <a:rPr>
+                <a:solidFill>
+                  <a:srgbClr val="1E293B"/>
+                </a:solidFill>
+              </a:rPr>
+              <a:t>Interactive computing environment used for modular step-by-step analysis, output persistence, and inline documentation.</a:t>
+            </a:r>
+          </a:p>
+        </p:txBody>
+      </p:sp>
+      <p:sp>
+        <p:nvSpPr>
+          <p:cNvPr id="19" name="Rounded Rectangle 18"/>
+          <p:cNvSpPr/>
+          <p:nvPr/>
+        </p:nvSpPr>
+        <p:spPr>
+          <a:xfrm>
+            <a:off x="6336792" y="1051560"/>
+            <a:ext cx="5120640" cy="2468880"/>
+          </a:xfrm>
+          <a:prstGeom prst="roundRect">
+            <a:avLst/>
+          </a:prstGeom>
+          <a:solidFill>
+            <a:srgbClr val="F8FAFC"/>
+          </a:solidFill>
+          <a:ln>
+            <a:solidFill>
+              <a:srgbClr val="CBD5E1"/>
+            </a:solidFill>
+          </a:ln>
+        </p:spPr>
+        <p:style>
+          <a:lnRef idx="1">
+            <a:schemeClr val="accent1"/>
+          </a:lnRef>
+          <a:fillRef idx="3">
+            <a:schemeClr val="accent1"/>
+          </a:fillRef>
+          <a:effectRef idx="2">
+            <a:schemeClr val="accent1"/>
+          </a:effectRef>
+          <a:fontRef idx="minor">
+            <a:schemeClr val="lt1"/>
+          </a:fontRef>
+        </p:style>
+        <p:txBody>
+          <a:bodyPr rtlCol="0" anchor="ctr" wrap="square" lIns="228600" tIns="228600" rIns="228600"/>
+          <a:lstStyle/>
+          <a:p>
+            <a:pPr algn="ctr">
+              <a:defRPr sz="1600" b="1">
+                <a:solidFill>
+                  <a:srgbClr val="1B365D"/>
+                </a:solidFill>
+                <a:latin typeface="Segoe UI"/>
+              </a:defRPr>
+            </a:pPr>
+            <a:r>
+              <a:t>Data Manipulation &amp; Math</a:t>
+            </a:r>
+          </a:p>
+          <a:p>
+            <a:pPr>
+              <a:spcAft>
+                <a:spcPts val="800"/>
+              </a:spcAft>
+              <a:defRPr sz="1300" b="1">
+                <a:solidFill>
+                  <a:srgbClr val="475569"/>
+                </a:solidFill>
+                <a:latin typeface="Segoe UI"/>
+              </a:defRPr>
+            </a:pPr>
+            <a:r>
+              <a:t>Pandas &amp; NumPy</a:t>
             </a:r>
           </a:p>
           <a:p>
@@ -15192,18 +17292,122 @@
               <a:spcAft>
                 <a:spcPts val="400"/>
               </a:spcAft>
-              <a:defRPr sz="1300"/>
+              <a:defRPr sz="1200">
+                <a:latin typeface="Segoe UI"/>
+              </a:defRPr>
             </a:pPr>
+            <a:r>
+              <a:rPr b="1">
+                <a:solidFill>
+                  <a:srgbClr val="1E293B"/>
+                </a:solidFill>
+              </a:rPr>
+              <a:t>• Pandas (v2.x): </a:t>
+            </a:r>
+            <a:r>
+              <a:rPr>
+                <a:solidFill>
+                  <a:srgbClr val="1E293B"/>
+                </a:solidFill>
+              </a:rPr>
+              <a:t>Efficient handling of 4,000-row tabular dataset, missing value imputation, multi-column groupbys, and statistical aggregation.</a:t>
+            </a:r>
           </a:p>
           <a:p>
             <a:pPr>
               <a:spcAft>
                 <a:spcPts val="400"/>
               </a:spcAft>
-              <a:defRPr sz="1300"/>
+              <a:defRPr sz="1200">
+                <a:latin typeface="Segoe UI"/>
+              </a:defRPr>
             </a:pPr>
             <a:r>
-              <a:t>Libraries:</a:t>
+              <a:rPr b="1">
+                <a:solidFill>
+                  <a:srgbClr val="1E293B"/>
+                </a:solidFill>
+              </a:rPr>
+              <a:t>• NumPy: </a:t>
+            </a:r>
+            <a:r>
+              <a:rPr>
+                <a:solidFill>
+                  <a:srgbClr val="1E293B"/>
+                </a:solidFill>
+              </a:rPr>
+              <a:t>Vectorized array calculations, numerical transformations, and foundational data structures.</a:t>
+            </a:r>
+          </a:p>
+        </p:txBody>
+      </p:sp>
+      <p:sp>
+        <p:nvSpPr>
+          <p:cNvPr id="20" name="Rounded Rectangle 19"/>
+          <p:cNvSpPr/>
+          <p:nvPr/>
+        </p:nvSpPr>
+        <p:spPr>
+          <a:xfrm>
+            <a:off x="731520" y="3657600"/>
+            <a:ext cx="5120640" cy="2468880"/>
+          </a:xfrm>
+          <a:prstGeom prst="roundRect">
+            <a:avLst/>
+          </a:prstGeom>
+          <a:solidFill>
+            <a:srgbClr val="F8FAFC"/>
+          </a:solidFill>
+          <a:ln>
+            <a:solidFill>
+              <a:srgbClr val="CBD5E1"/>
+            </a:solidFill>
+          </a:ln>
+        </p:spPr>
+        <p:style>
+          <a:lnRef idx="1">
+            <a:schemeClr val="accent1"/>
+          </a:lnRef>
+          <a:fillRef idx="3">
+            <a:schemeClr val="accent1"/>
+          </a:fillRef>
+          <a:effectRef idx="2">
+            <a:schemeClr val="accent1"/>
+          </a:effectRef>
+          <a:fontRef idx="minor">
+            <a:schemeClr val="lt1"/>
+          </a:fontRef>
+        </p:style>
+        <p:txBody>
+          <a:bodyPr rtlCol="0" anchor="ctr" wrap="square" lIns="228600" tIns="228600" rIns="228600"/>
+          <a:lstStyle/>
+          <a:p>
+            <a:pPr algn="ctr">
+              <a:defRPr sz="1600" b="1">
+                <a:solidFill>
+                  <a:srgbClr val="1B365D"/>
+                </a:solidFill>
+                <a:latin typeface="Segoe UI"/>
+              </a:defRPr>
+            </a:pPr>
+            <a:r>
+              <a:t>Data Visualization</a:t>
+            </a:r>
+          </a:p>
+          <a:p>
+            <a:pPr>
+              <a:spcAft>
+                <a:spcPts val="800"/>
+              </a:spcAft>
+              <a:defRPr sz="1300" b="1">
+                <a:solidFill>
+                  <a:srgbClr val="475569"/>
+                </a:solidFill>
+                <a:latin typeface="Segoe UI"/>
+              </a:defRPr>
+            </a:pPr>
+            <a:r>
+              <a:t>Matplotlib &amp; Seaborn</a:t>
             </a:r>
           </a:p>
           <a:p>
@@ -15211,10 +17415,25 @@
               <a:spcAft>
                 <a:spcPts val="400"/>
               </a:spcAft>
-              <a:defRPr sz="1300"/>
+              <a:defRPr sz="1200">
+                <a:latin typeface="Segoe UI"/>
+              </a:defRPr>
             </a:pPr>
             <a:r>
-              <a:t>  • Pandas — Data manipulation and analysis</a:t>
+              <a:rPr b="1">
+                <a:solidFill>
+                  <a:srgbClr val="1E293B"/>
+                </a:solidFill>
+              </a:rPr>
+              <a:t>• Matplotlib: </a:t>
+            </a:r>
+            <a:r>
+              <a:rPr>
+                <a:solidFill>
+                  <a:srgbClr val="1E293B"/>
+                </a:solidFill>
+              </a:rPr>
+              <a:t>Custom figure formatting, axis scaling, dual-axis plotting, and rasterization of 12 publication-quality PNG charts.</a:t>
             </a:r>
           </a:p>
           <a:p>
@@ -15222,10 +17441,96 @@
               <a:spcAft>
                 <a:spcPts val="400"/>
               </a:spcAft>
-              <a:defRPr sz="1300"/>
+              <a:defRPr sz="1200">
+                <a:latin typeface="Segoe UI"/>
+              </a:defRPr>
             </a:pPr>
             <a:r>
-              <a:t>  • NumPy — Numerical computing</a:t>
+              <a:rPr b="1">
+                <a:solidFill>
+                  <a:srgbClr val="1E293B"/>
+                </a:solidFill>
+              </a:rPr>
+              <a:t>• Seaborn: </a:t>
+            </a:r>
+            <a:r>
+              <a:rPr>
+                <a:solidFill>
+                  <a:srgbClr val="1E293B"/>
+                </a:solidFill>
+              </a:rPr>
+              <a:t>High-level statistical visualization including multi-feature correlation heatmaps, categorical bar charts, and regression scatters.</a:t>
+            </a:r>
+          </a:p>
+        </p:txBody>
+      </p:sp>
+      <p:sp>
+        <p:nvSpPr>
+          <p:cNvPr id="21" name="Rounded Rectangle 20"/>
+          <p:cNvSpPr/>
+          <p:nvPr/>
+        </p:nvSpPr>
+        <p:spPr>
+          <a:xfrm>
+            <a:off x="6336792" y="3657600"/>
+            <a:ext cx="5120640" cy="2468880"/>
+          </a:xfrm>
+          <a:prstGeom prst="roundRect">
+            <a:avLst/>
+          </a:prstGeom>
+          <a:solidFill>
+            <a:srgbClr val="F8FAFC"/>
+          </a:solidFill>
+          <a:ln>
+            <a:solidFill>
+              <a:srgbClr val="CBD5E1"/>
+            </a:solidFill>
+          </a:ln>
+        </p:spPr>
+        <p:style>
+          <a:lnRef idx="1">
+            <a:schemeClr val="accent1"/>
+          </a:lnRef>
+          <a:fillRef idx="3">
+            <a:schemeClr val="accent1"/>
+          </a:fillRef>
+          <a:effectRef idx="2">
+            <a:schemeClr val="accent1"/>
+          </a:effectRef>
+          <a:fontRef idx="minor">
+            <a:schemeClr val="lt1"/>
+          </a:fontRef>
+        </p:style>
+        <p:txBody>
+          <a:bodyPr rtlCol="0" anchor="ctr" wrap="square" lIns="228600" tIns="228600" rIns="228600"/>
+          <a:lstStyle/>
+          <a:p>
+            <a:pPr algn="ctr">
+              <a:defRPr sz="1600" b="1">
+                <a:solidFill>
+                  <a:srgbClr val="1B365D"/>
+                </a:solidFill>
+                <a:latin typeface="Segoe UI"/>
+              </a:defRPr>
+            </a:pPr>
+            <a:r>
+              <a:t>Dataset Pipeline &amp; Versioning</a:t>
+            </a:r>
+          </a:p>
+          <a:p>
+            <a:pPr>
+              <a:spcAft>
+                <a:spcPts val="800"/>
+              </a:spcAft>
+              <a:defRPr sz="1300" b="1">
+                <a:solidFill>
+                  <a:srgbClr val="475569"/>
+                </a:solidFill>
+                <a:latin typeface="Segoe UI"/>
+              </a:defRPr>
+            </a:pPr>
+            <a:r>
+              <a:t>CSV &amp; Git / GitHub</a:t>
             </a:r>
           </a:p>
           <a:p>
@@ -15233,10 +17538,25 @@
               <a:spcAft>
                 <a:spcPts val="400"/>
               </a:spcAft>
-              <a:defRPr sz="1300"/>
+              <a:defRPr sz="1200">
+                <a:latin typeface="Segoe UI"/>
+              </a:defRPr>
             </a:pPr>
             <a:r>
-              <a:t>  • Matplotlib — Data visualization</a:t>
+              <a:rPr b="1">
+                <a:solidFill>
+                  <a:srgbClr val="1E293B"/>
+                </a:solidFill>
+              </a:rPr>
+              <a:t>• Structured CSV: </a:t>
+            </a:r>
+            <a:r>
+              <a:rPr>
+                <a:solidFill>
+                  <a:srgbClr val="1E293B"/>
+                </a:solidFill>
+              </a:rPr>
+              <a:t>Clean 28-variable schema preserving original records while maintaining full portability across data workflows.</a:t>
             </a:r>
           </a:p>
           <a:p>
@@ -15244,70 +17564,25 @@
               <a:spcAft>
                 <a:spcPts val="400"/>
               </a:spcAft>
-              <a:defRPr sz="1300"/>
+              <a:defRPr sz="1200">
+                <a:latin typeface="Segoe UI"/>
+              </a:defRPr>
             </a:pPr>
             <a:r>
-              <a:t>  • Seaborn — Statistical visualization</a:t>
-            </a:r>
-          </a:p>
-          <a:p>
-            <a:pPr>
-              <a:spcAft>
-                <a:spcPts val="400"/>
-              </a:spcAft>
-              <a:defRPr sz="1300"/>
-            </a:pPr>
-          </a:p>
-          <a:p>
-            <a:pPr>
-              <a:spcAft>
-                <a:spcPts val="400"/>
-              </a:spcAft>
-              <a:defRPr sz="1300"/>
-            </a:pPr>
-            <a:r>
-              <a:t>Development Environment:</a:t>
-            </a:r>
-          </a:p>
-          <a:p>
-            <a:pPr>
-              <a:spcAft>
-                <a:spcPts val="400"/>
-              </a:spcAft>
-              <a:defRPr sz="1300"/>
-            </a:pPr>
-            <a:r>
-              <a:t>  • Jupyter Notebook</a:t>
-            </a:r>
-          </a:p>
-          <a:p>
-            <a:pPr>
-              <a:spcAft>
-                <a:spcPts val="400"/>
-              </a:spcAft>
-              <a:defRPr sz="1300"/>
-            </a:pPr>
-          </a:p>
-          <a:p>
-            <a:pPr>
-              <a:spcAft>
-                <a:spcPts val="400"/>
-              </a:spcAft>
-              <a:defRPr sz="1300"/>
-            </a:pPr>
-            <a:r>
-              <a:t>Data Format:</a:t>
-            </a:r>
-          </a:p>
-          <a:p>
-            <a:pPr>
-              <a:spcAft>
-                <a:spcPts val="400"/>
-              </a:spcAft>
-              <a:defRPr sz="1300"/>
-            </a:pPr>
-            <a:r>
-              <a:t>  • CSV (4,000 records × 28 columns)</a:t>
+              <a:rPr b="1">
+                <a:solidFill>
+                  <a:srgbClr val="1E293B"/>
+                </a:solidFill>
+              </a:rPr>
+              <a:t>• Git &amp; GitHub: </a:t>
+            </a:r>
+            <a:r>
+              <a:rPr>
+                <a:solidFill>
+                  <a:srgbClr val="1E293B"/>
+                </a:solidFill>
+              </a:rPr>
+              <a:t>Version-controlled project repository ensuring full reproducibility of code, dataset, charts, and documentation.</a:t>
             </a:r>
           </a:p>
         </p:txBody>
@@ -15604,16 +17879,18 @@
         <p:spPr>
           <a:xfrm>
             <a:off x="0" y="0"/>
-            <a:ext cx="12192000" cy="731520"/>
+            <a:ext cx="12191999" cy="731520"/>
           </a:xfrm>
           <a:prstGeom prst="rect">
             <a:avLst/>
           </a:prstGeom>
           <a:solidFill>
-            <a:srgbClr val="E63946"/>
+            <a:srgbClr val="1B365D"/>
           </a:solidFill>
           <a:ln>
-            <a:noFill/>
+            <a:solidFill>
+              <a:srgbClr val="1B365D"/>
+            </a:solidFill>
           </a:ln>
         </p:spPr>
         <p:style>
@@ -15631,71 +17908,105 @@
           </a:fontRef>
         </p:style>
         <p:txBody>
-          <a:bodyPr rtlCol="0" anchor="ctr" wrap="square" lIns="457200"/>
+          <a:bodyPr rtlCol="0" anchor="ctr" wrap="square"/>
           <a:lstStyle/>
           <a:p>
-            <a:pPr algn="l">
-              <a:defRPr sz="2400" b="1">
+            <a:pPr algn="ctr">
+              <a:defRPr sz="2200" b="1">
                 <a:solidFill>
                   <a:srgbClr val="FFFFFF"/>
                 </a:solidFill>
+                <a:latin typeface="Segoe UI"/>
               </a:defRPr>
             </a:pPr>
             <a:r>
-              <a:t>  Results — Season-wise Performance</a:t>
+              <a:t>   Results — Season-wise Performance Analysis</a:t>
             </a:r>
           </a:p>
         </p:txBody>
       </p:sp>
       <p:sp>
         <p:nvSpPr>
-          <p:cNvPr id="32" name="TextBox 31"/>
-          <p:cNvSpPr txBox="1"/>
+          <p:cNvPr id="32" name="Rounded Rectangle 31"/>
+          <p:cNvSpPr/>
           <p:nvPr/>
         </p:nvSpPr>
         <p:spPr>
           <a:xfrm>
-            <a:off x="365760" y="914400"/>
-            <a:ext cx="8412480" cy="1828800"/>
+            <a:off x="731520" y="868680"/>
+            <a:ext cx="10728655" cy="1371600"/>
           </a:xfrm>
-          <a:prstGeom prst="rect">
+          <a:prstGeom prst="roundRect">
             <a:avLst/>
           </a:prstGeom>
-          <a:noFill/>
+          <a:solidFill>
+            <a:srgbClr val="F8FAFC"/>
+          </a:solidFill>
+          <a:ln>
+            <a:solidFill>
+              <a:srgbClr val="CBD5E1"/>
+            </a:solidFill>
+          </a:ln>
         </p:spPr>
+        <p:style>
+          <a:lnRef idx="1">
+            <a:schemeClr val="accent1"/>
+          </a:lnRef>
+          <a:fillRef idx="3">
+            <a:schemeClr val="accent1"/>
+          </a:fillRef>
+          <a:effectRef idx="2">
+            <a:schemeClr val="accent1"/>
+          </a:effectRef>
+          <a:fontRef idx="minor">
+            <a:schemeClr val="lt1"/>
+          </a:fontRef>
+        </p:style>
         <p:txBody>
-          <a:bodyPr wrap="square">
-            <a:spAutoFit/>
-          </a:bodyPr>
+          <a:bodyPr rtlCol="0" anchor="ctr" wrap="square" lIns="228600" tIns="137160"/>
           <a:lstStyle/>
           <a:p>
-            <a:pPr algn="l">
-              <a:defRPr sz="1100" b="0"/>
+            <a:pPr algn="ctr">
+              <a:spcAft>
+                <a:spcPts val="400"/>
+              </a:spcAft>
+              <a:defRPr sz="1300" b="1">
+                <a:solidFill>
+                  <a:srgbClr val="1B365D"/>
+                </a:solidFill>
+                <a:latin typeface="Segoe UI"/>
+              </a:defRPr>
             </a:pPr>
             <a:r>
-              <a:t>Average Yield (t/ha):    Kharif: 5.64  |  Rabi: 5.08  |  Zaid: 4.67</a:t>
+              <a:t>KEY METRICS COMPARISON ACROSS SEASONS (EXACT DATASET VALUES)</a:t>
+            </a:r>
+          </a:p>
+          <a:p>
+            <a:pPr>
+              <a:defRPr sz="1200" b="1">
+                <a:solidFill>
+                  <a:srgbClr val="1E293B"/>
+                </a:solidFill>
+                <a:latin typeface="Segoe UI"/>
+              </a:defRPr>
+            </a:pPr>
+            <a:r>
+              <a:t>• Average Yield (t/ha):  Kharif: 5.63  |  Rabi: 5.04  |  Zaid: 4.64</a:t>
             </a:r>
             <a:br/>
+            <a:r>
+              <a:t>• Average Profit (₹):  Kharif: ₹1,78,915  |  Rabi: ₹87,689  |  Zaid: -₹24,805</a:t>
+            </a:r>
             <a:br/>
             <a:r>
-              <a:t>Average Profit (₹):      Kharif: ₹178,915  |  Rabi: ₹87,689  |  Zaid: ₹-24,805</a:t>
-            </a:r>
-            <a:br/>
-            <a:br/>
-            <a:r>
-              <a:t>Profitable Farms:        Kharif: 57.8%  |  Rabi: 48.9%  |  Zaid: 35.5%</a:t>
-            </a:r>
-            <a:br/>
-            <a:br/>
-            <a:r>
-              <a:t>Avg Rainfall (mm):       Kharif: 852  |  Rabi: 436  |  Zaid: 299</a:t>
+              <a:t>• Profitable Farms (%):  Kharif: 57.8% (1,028 farms)  |  Rabi: 48.9% (795 farms)  |  Zaid: 35.5% (211 farms)</a:t>
             </a:r>
           </a:p>
         </p:txBody>
       </p:sp>
       <p:pic>
         <p:nvPicPr>
-          <p:cNvPr id="33" name="Picture 32" descr="01_avg_yield_by_season.png"/>
+          <p:cNvPr id="33" name="Picture 32" descr="image.png"/>
           <p:cNvPicPr>
             <a:picLocks noChangeAspect="1"/>
           </p:cNvPicPr>
@@ -15709,8 +18020,8 @@
         </p:blipFill>
         <p:spPr>
           <a:xfrm>
-            <a:off x="731520" y="2743200"/>
-            <a:ext cx="5029200" cy="3104761"/>
+            <a:off x="731520" y="2423160"/>
+            <a:ext cx="5120640" cy="3154680"/>
           </a:xfrm>
           <a:prstGeom prst="rect">
             <a:avLst/>
@@ -15719,7 +18030,7 @@
       </p:pic>
       <p:pic>
         <p:nvPicPr>
-          <p:cNvPr id="34" name="Picture 33" descr="02_avg_profit_by_season.png"/>
+          <p:cNvPr id="34" name="Picture 33" descr="image.png"/>
           <p:cNvPicPr>
             <a:picLocks noChangeAspect="1"/>
           </p:cNvPicPr>
@@ -15733,14 +18044,50 @@
         </p:blipFill>
         <p:spPr>
           <a:xfrm>
-            <a:off x="6217920" y="2743200"/>
-            <a:ext cx="5029200" cy="3099490"/>
+            <a:off x="6336792" y="2423160"/>
+            <a:ext cx="5120640" cy="3154680"/>
           </a:xfrm>
           <a:prstGeom prst="rect">
             <a:avLst/>
           </a:prstGeom>
         </p:spPr>
       </p:pic>
+      <p:sp>
+        <p:nvSpPr>
+          <p:cNvPr id="35" name="TextBox 34"/>
+          <p:cNvSpPr txBox="1"/>
+          <p:nvPr/>
+        </p:nvSpPr>
+        <p:spPr>
+          <a:xfrm>
+            <a:off x="731520" y="5715000"/>
+            <a:ext cx="10728655" cy="411480"/>
+          </a:xfrm>
+          <a:prstGeom prst="rect">
+            <a:avLst/>
+          </a:prstGeom>
+          <a:noFill/>
+        </p:spPr>
+        <p:txBody>
+          <a:bodyPr wrap="none">
+            <a:spAutoFit/>
+          </a:bodyPr>
+          <a:lstStyle/>
+          <a:p>
+            <a:pPr>
+              <a:defRPr sz="1100" b="1">
+                <a:solidFill>
+                  <a:srgbClr val="475569"/>
+                </a:solidFill>
+                <a:latin typeface="Segoe UI"/>
+              </a:defRPr>
+            </a:pPr>
+            <a:r>
+              <a:t>Key Insight: Kharif achieves highest yield (5.63 t/ha) &amp; profitability due to monsoon rainfall. Zaid suffers from water deficit, yielding -₹24.8K average profit.</a:t>
+            </a:r>
+          </a:p>
+        </p:txBody>
+      </p:sp>
     </p:spTree>
     <p:extLst>
       <p:ext uri="{BB962C8B-B14F-4D97-AF65-F5344CB8AC3E}">
@@ -16244,16 +18591,18 @@
         <p:spPr>
           <a:xfrm>
             <a:off x="0" y="0"/>
-            <a:ext cx="12192000" cy="731520"/>
+            <a:ext cx="12191999" cy="731520"/>
           </a:xfrm>
           <a:prstGeom prst="rect">
             <a:avLst/>
           </a:prstGeom>
           <a:solidFill>
-            <a:srgbClr val="E63946"/>
+            <a:srgbClr val="1B365D"/>
           </a:solidFill>
           <a:ln>
-            <a:noFill/>
+            <a:solidFill>
+              <a:srgbClr val="1B365D"/>
+            </a:solidFill>
           </a:ln>
         </p:spPr>
         <p:style>
@@ -16271,65 +18620,105 @@
           </a:fontRef>
         </p:style>
         <p:txBody>
-          <a:bodyPr rtlCol="0" anchor="ctr" wrap="square" lIns="457200"/>
+          <a:bodyPr rtlCol="0" anchor="ctr" wrap="square"/>
           <a:lstStyle/>
           <a:p>
-            <a:pPr algn="l">
-              <a:defRPr sz="2400" b="1">
+            <a:pPr algn="ctr">
+              <a:defRPr sz="2200" b="1">
                 <a:solidFill>
                   <a:srgbClr val="FFFFFF"/>
                 </a:solidFill>
+                <a:latin typeface="Segoe UI"/>
               </a:defRPr>
             </a:pPr>
             <a:r>
-              <a:t>  Results — Production &amp; Crop Analysis</a:t>
+              <a:t>   Results — Total Production &amp; Crop-wise Yield Analysis</a:t>
             </a:r>
           </a:p>
         </p:txBody>
       </p:sp>
       <p:sp>
         <p:nvSpPr>
-          <p:cNvPr id="32" name="TextBox 31"/>
-          <p:cNvSpPr txBox="1"/>
+          <p:cNvPr id="32" name="Rounded Rectangle 31"/>
+          <p:cNvSpPr/>
           <p:nvPr/>
         </p:nvSpPr>
         <p:spPr>
           <a:xfrm>
-            <a:off x="365760" y="914400"/>
-            <a:ext cx="8412480" cy="1371600"/>
+            <a:off x="731520" y="868680"/>
+            <a:ext cx="10728655" cy="1371600"/>
           </a:xfrm>
-          <a:prstGeom prst="rect">
+          <a:prstGeom prst="roundRect">
             <a:avLst/>
           </a:prstGeom>
-          <a:noFill/>
+          <a:solidFill>
+            <a:srgbClr val="F8FAFC"/>
+          </a:solidFill>
+          <a:ln>
+            <a:solidFill>
+              <a:srgbClr val="CBD5E1"/>
+            </a:solidFill>
+          </a:ln>
         </p:spPr>
+        <p:style>
+          <a:lnRef idx="1">
+            <a:schemeClr val="accent1"/>
+          </a:lnRef>
+          <a:fillRef idx="3">
+            <a:schemeClr val="accent1"/>
+          </a:fillRef>
+          <a:effectRef idx="2">
+            <a:schemeClr val="accent1"/>
+          </a:effectRef>
+          <a:fontRef idx="minor">
+            <a:schemeClr val="lt1"/>
+          </a:fontRef>
+        </p:style>
         <p:txBody>
-          <a:bodyPr wrap="square">
-            <a:spAutoFit/>
-          </a:bodyPr>
+          <a:bodyPr rtlCol="0" anchor="ctr" wrap="square" lIns="228600" tIns="137160"/>
           <a:lstStyle/>
           <a:p>
-            <a:pPr algn="l">
-              <a:defRPr sz="1100" b="0"/>
+            <a:pPr algn="ctr">
+              <a:spcAft>
+                <a:spcPts val="400"/>
+              </a:spcAft>
+              <a:defRPr sz="1300" b="1">
+                <a:solidFill>
+                  <a:srgbClr val="1B365D"/>
+                </a:solidFill>
+                <a:latin typeface="Segoe UI"/>
+              </a:defRPr>
             </a:pPr>
             <a:r>
-              <a:t>Total Production:  Kharif: 82,388 t  |  Rabi: 67,499 t  |  Zaid: 23,098 t</a:t>
+              <a:t>PRODUCTION VOLUME &amp; TOP CROP PERFORMANCE (EXACT DATASET VALUES)</a:t>
+            </a:r>
+          </a:p>
+          <a:p>
+            <a:pPr>
+              <a:defRPr sz="1200" b="1">
+                <a:solidFill>
+                  <a:srgbClr val="1E293B"/>
+                </a:solidFill>
+                <a:latin typeface="Segoe UI"/>
+              </a:defRPr>
+            </a:pPr>
+            <a:r>
+              <a:t>• Total Production:  Kharif: 82,388 tonnes (47.6%)  |  Rabi: 67,499 tonnes (39.0%)  |  Zaid: 23,098 tonnes (13.4%)</a:t>
             </a:r>
             <a:br/>
+            <a:r>
+              <a:t>• Top Crops by Yield (t/ha):  Sugarcane: 46.64  |  Maize: 2.71  |  Rice: 2.43  |  Wheat: 2.11  |  Chilli: 1.54</a:t>
+            </a:r>
             <a:br/>
             <a:r>
-              <a:t>Top Crops by Yield:  Sugarcane (46.94 t/ha), Maize (2.72), Rice (2.44)</a:t>
-            </a:r>
-            <a:br/>
-            <a:r>
-              <a:t>Top Crops by Profit:  Sugarcane (₹817,188), Chilli (₹750,878)</a:t>
+              <a:t>• Top Crops by Net Profit (₹):  Sugarcane: ₹8,17,188  |  Chilli: ₹7,50,878  |  Cotton: ₹1,24,547</a:t>
             </a:r>
           </a:p>
         </p:txBody>
       </p:sp>
       <p:pic>
         <p:nvPicPr>
-          <p:cNvPr id="33" name="Picture 32" descr="03_total_production_by_season.png"/>
+          <p:cNvPr id="33" name="Picture 32" descr="image.png"/>
           <p:cNvPicPr>
             <a:picLocks noChangeAspect="1"/>
           </p:cNvPicPr>
@@ -16343,8 +18732,8 @@
         </p:blipFill>
         <p:spPr>
           <a:xfrm>
-            <a:off x="731520" y="2468880"/>
-            <a:ext cx="5029200" cy="3099490"/>
+            <a:off x="731520" y="2423160"/>
+            <a:ext cx="5120640" cy="3154680"/>
           </a:xfrm>
           <a:prstGeom prst="rect">
             <a:avLst/>
@@ -16353,7 +18742,7 @@
       </p:pic>
       <p:pic>
         <p:nvPicPr>
-          <p:cNvPr id="34" name="Picture 33" descr="09_crop_wise_avg_yield.png"/>
+          <p:cNvPr id="34" name="Picture 33" descr="image.png"/>
           <p:cNvPicPr>
             <a:picLocks noChangeAspect="1"/>
           </p:cNvPicPr>
@@ -16367,14 +18756,50 @@
         </p:blipFill>
         <p:spPr>
           <a:xfrm>
-            <a:off x="6217920" y="2468880"/>
-            <a:ext cx="5029200" cy="2992921"/>
+            <a:off x="6336792" y="2423160"/>
+            <a:ext cx="5120640" cy="3044952"/>
           </a:xfrm>
           <a:prstGeom prst="rect">
             <a:avLst/>
           </a:prstGeom>
         </p:spPr>
       </p:pic>
+      <p:sp>
+        <p:nvSpPr>
+          <p:cNvPr id="35" name="TextBox 34"/>
+          <p:cNvSpPr txBox="1"/>
+          <p:nvPr/>
+        </p:nvSpPr>
+        <p:spPr>
+          <a:xfrm>
+            <a:off x="731520" y="5715000"/>
+            <a:ext cx="10728655" cy="411480"/>
+          </a:xfrm>
+          <a:prstGeom prst="rect">
+            <a:avLst/>
+          </a:prstGeom>
+          <a:noFill/>
+        </p:spPr>
+        <p:txBody>
+          <a:bodyPr wrap="none">
+            <a:spAutoFit/>
+          </a:bodyPr>
+          <a:lstStyle/>
+          <a:p>
+            <a:pPr>
+              <a:defRPr sz="1100" b="1">
+                <a:solidFill>
+                  <a:srgbClr val="475569"/>
+                </a:solidFill>
+                <a:latin typeface="Segoe UI"/>
+              </a:defRPr>
+            </a:pPr>
+            <a:r>
+              <a:t>Key Insight: Sugarcane dominates biomass production (46.64 t/ha) &amp; profit (₹8.17L). Staple cereals (Rice, Wheat) show lower yields &amp; negative margins due to input costs.</a:t>
+            </a:r>
+          </a:p>
+        </p:txBody>
+      </p:sp>
     </p:spTree>
     <p:extLst>
       <p:ext uri="{BB962C8B-B14F-4D97-AF65-F5344CB8AC3E}">
@@ -16878,16 +19303,18 @@
         <p:spPr>
           <a:xfrm>
             <a:off x="0" y="0"/>
-            <a:ext cx="12192000" cy="731520"/>
+            <a:ext cx="12191999" cy="731520"/>
           </a:xfrm>
           <a:prstGeom prst="rect">
             <a:avLst/>
           </a:prstGeom>
           <a:solidFill>
-            <a:srgbClr val="E63946"/>
+            <a:srgbClr val="1B365D"/>
           </a:solidFill>
           <a:ln>
-            <a:noFill/>
+            <a:solidFill>
+              <a:srgbClr val="1B365D"/>
+            </a:solidFill>
           </a:ln>
         </p:spPr>
         <p:style>
@@ -16905,66 +19332,105 @@
           </a:fontRef>
         </p:style>
         <p:txBody>
-          <a:bodyPr rtlCol="0" anchor="ctr" wrap="square" lIns="457200"/>
+          <a:bodyPr rtlCol="0" anchor="ctr" wrap="square"/>
           <a:lstStyle/>
           <a:p>
-            <a:pPr algn="l">
-              <a:defRPr sz="2400" b="1">
+            <a:pPr algn="ctr">
+              <a:defRPr sz="2200" b="1">
                 <a:solidFill>
                   <a:srgbClr val="FFFFFF"/>
                 </a:solidFill>
+                <a:latin typeface="Segoe UI"/>
               </a:defRPr>
             </a:pPr>
             <a:r>
-              <a:t>  Results — Environmental Analysis</a:t>
+              <a:t>   Results — Environmental Factors &amp; Pest/Disease Risk</a:t>
             </a:r>
           </a:p>
         </p:txBody>
       </p:sp>
       <p:sp>
         <p:nvSpPr>
-          <p:cNvPr id="32" name="TextBox 31"/>
-          <p:cNvSpPr txBox="1"/>
+          <p:cNvPr id="32" name="Rounded Rectangle 31"/>
+          <p:cNvSpPr/>
           <p:nvPr/>
         </p:nvSpPr>
         <p:spPr>
           <a:xfrm>
-            <a:off x="365760" y="914400"/>
-            <a:ext cx="8412480" cy="1371600"/>
+            <a:off x="731520" y="868680"/>
+            <a:ext cx="10728655" cy="1371600"/>
           </a:xfrm>
-          <a:prstGeom prst="rect">
+          <a:prstGeom prst="roundRect">
             <a:avLst/>
           </a:prstGeom>
-          <a:noFill/>
+          <a:solidFill>
+            <a:srgbClr val="F8FAFC"/>
+          </a:solidFill>
+          <a:ln>
+            <a:solidFill>
+              <a:srgbClr val="CBD5E1"/>
+            </a:solidFill>
+          </a:ln>
         </p:spPr>
+        <p:style>
+          <a:lnRef idx="1">
+            <a:schemeClr val="accent1"/>
+          </a:lnRef>
+          <a:fillRef idx="3">
+            <a:schemeClr val="accent1"/>
+          </a:fillRef>
+          <a:effectRef idx="2">
+            <a:schemeClr val="accent1"/>
+          </a:effectRef>
+          <a:fontRef idx="minor">
+            <a:schemeClr val="lt1"/>
+          </a:fontRef>
+        </p:style>
         <p:txBody>
-          <a:bodyPr wrap="square">
-            <a:spAutoFit/>
-          </a:bodyPr>
+          <a:bodyPr rtlCol="0" anchor="ctr" wrap="square" lIns="228600" tIns="137160"/>
           <a:lstStyle/>
           <a:p>
-            <a:pPr algn="l">
-              <a:defRPr sz="1100" b="0"/>
+            <a:pPr algn="ctr">
+              <a:spcAft>
+                <a:spcPts val="400"/>
+              </a:spcAft>
+              <a:defRPr sz="1300" b="1">
+                <a:solidFill>
+                  <a:srgbClr val="1B365D"/>
+                </a:solidFill>
+                <a:latin typeface="Segoe UI"/>
+              </a:defRPr>
             </a:pPr>
             <a:r>
-              <a:t>Avg Temperature:  Kharif: 28.5°C  |  Rabi: 23.5°C  |  Zaid: 31.0°C</a:t>
+              <a:t>ENVIRONMENTAL DYNAMICS &amp; DISEASE CORRELATIONS</a:t>
+            </a:r>
+          </a:p>
+          <a:p>
+            <a:pPr>
+              <a:defRPr sz="1200" b="1">
+                <a:solidFill>
+                  <a:srgbClr val="1E293B"/>
+                </a:solidFill>
+                <a:latin typeface="Segoe UI"/>
+              </a:defRPr>
+            </a:pPr>
+            <a:r>
+              <a:t>• Avg Temperature (°C):  Kharif: 28.5°C  |  Rabi: 23.5°C  |  Zaid: 31.0°C (Highest thermal stress)</a:t>
             </a:r>
             <a:br/>
+            <a:r>
+              <a:t>• Disease &amp; Pest Risk (%):  Kharif: 54.5%  |  Rabi: 40.5%  |  Zaid: 38.2%</a:t>
+            </a:r>
             <a:br/>
             <a:r>
-              <a:t>Disease Risk:  Kharif: 54.5%  |  Rabi: 40.5%  |  Zaid: 38.2%</a:t>
-            </a:r>
-            <a:br/>
-            <a:br/>
-            <a:r>
-              <a:t>Rainfall–Disease Correlation: r = 0.625 (moderate positive association)</a:t>
+              <a:t>• Critical Correlation: Rainfall ↔ Disease Risk (r = 0.622) &amp; Humidity ↔ Disease Risk (r = 0.545) show strong positive links.</a:t>
             </a:r>
           </a:p>
         </p:txBody>
       </p:sp>
       <p:pic>
         <p:nvPicPr>
-          <p:cNvPr id="33" name="Picture 32" descr="04_rainfall_vs_yield.png"/>
+          <p:cNvPr id="33" name="Picture 32" descr="image.png"/>
           <p:cNvPicPr>
             <a:picLocks noChangeAspect="1"/>
           </p:cNvPicPr>
@@ -16978,8 +19444,8 @@
         </p:blipFill>
         <p:spPr>
           <a:xfrm>
-            <a:off x="731520" y="2468880"/>
-            <a:ext cx="5029200" cy="2982789"/>
+            <a:off x="731520" y="2423160"/>
+            <a:ext cx="5120640" cy="3035808"/>
           </a:xfrm>
           <a:prstGeom prst="rect">
             <a:avLst/>
@@ -16988,7 +19454,7 @@
       </p:pic>
       <p:pic>
         <p:nvPicPr>
-          <p:cNvPr id="34" name="Picture 33" descr="08_disease_risk_by_season.png"/>
+          <p:cNvPr id="34" name="Picture 33" descr="image.png"/>
           <p:cNvPicPr>
             <a:picLocks noChangeAspect="1"/>
           </p:cNvPicPr>
@@ -17002,14 +19468,50 @@
         </p:blipFill>
         <p:spPr>
           <a:xfrm>
-            <a:off x="6217920" y="2468880"/>
-            <a:ext cx="5029200" cy="3102123"/>
+            <a:off x="6336792" y="2423160"/>
+            <a:ext cx="5120640" cy="3154680"/>
           </a:xfrm>
           <a:prstGeom prst="rect">
             <a:avLst/>
           </a:prstGeom>
         </p:spPr>
       </p:pic>
+      <p:sp>
+        <p:nvSpPr>
+          <p:cNvPr id="35" name="TextBox 34"/>
+          <p:cNvSpPr txBox="1"/>
+          <p:nvPr/>
+        </p:nvSpPr>
+        <p:spPr>
+          <a:xfrm>
+            <a:off x="731520" y="5715000"/>
+            <a:ext cx="10728655" cy="411480"/>
+          </a:xfrm>
+          <a:prstGeom prst="rect">
+            <a:avLst/>
+          </a:prstGeom>
+          <a:noFill/>
+        </p:spPr>
+        <p:txBody>
+          <a:bodyPr wrap="none">
+            <a:spAutoFit/>
+          </a:bodyPr>
+          <a:lstStyle/>
+          <a:p>
+            <a:pPr>
+              <a:defRPr sz="1100" b="1">
+                <a:solidFill>
+                  <a:srgbClr val="475569"/>
+                </a:solidFill>
+                <a:latin typeface="Segoe UI"/>
+              </a:defRPr>
+            </a:pPr>
+            <a:r>
+              <a:t>Key Insight: Direct correlation between Rainfall/Temp and Yield is weak individually (r ≈ 0.01-0.03), but high rainfall drives severe pest outbreaks (54.5% in Kharif).</a:t>
+            </a:r>
+          </a:p>
+        </p:txBody>
+      </p:sp>
     </p:spTree>
     <p:extLst>
       <p:ext uri="{BB962C8B-B14F-4D97-AF65-F5344CB8AC3E}">
@@ -17513,16 +20015,18 @@
         <p:spPr>
           <a:xfrm>
             <a:off x="0" y="0"/>
-            <a:ext cx="12192000" cy="731520"/>
+            <a:ext cx="12191999" cy="731520"/>
           </a:xfrm>
           <a:prstGeom prst="rect">
             <a:avLst/>
           </a:prstGeom>
           <a:solidFill>
-            <a:srgbClr val="E63946"/>
+            <a:srgbClr val="1B365D"/>
           </a:solidFill>
           <a:ln>
-            <a:noFill/>
+            <a:solidFill>
+              <a:srgbClr val="1B365D"/>
+            </a:solidFill>
           </a:ln>
         </p:spPr>
         <p:style>
@@ -17540,66 +20044,105 @@
           </a:fontRef>
         </p:style>
         <p:txBody>
-          <a:bodyPr rtlCol="0" anchor="ctr" wrap="square" lIns="457200"/>
+          <a:bodyPr rtlCol="0" anchor="ctr" wrap="square"/>
           <a:lstStyle/>
           <a:p>
-            <a:pPr algn="l">
-              <a:defRPr sz="2400" b="1">
+            <a:pPr algn="ctr">
+              <a:defRPr sz="2200" b="1">
                 <a:solidFill>
                   <a:srgbClr val="FFFFFF"/>
                 </a:solidFill>
+                <a:latin typeface="Segoe UI"/>
               </a:defRPr>
             </a:pPr>
             <a:r>
-              <a:t>  Results — Irrigation &amp; Water Analysis</a:t>
+              <a:t>   Results — Irrigation Methods &amp; Water Efficiency</a:t>
             </a:r>
           </a:p>
         </p:txBody>
       </p:sp>
       <p:sp>
         <p:nvSpPr>
-          <p:cNvPr id="32" name="TextBox 31"/>
-          <p:cNvSpPr txBox="1"/>
+          <p:cNvPr id="32" name="Rounded Rectangle 31"/>
+          <p:cNvSpPr/>
           <p:nvPr/>
         </p:nvSpPr>
         <p:spPr>
           <a:xfrm>
-            <a:off x="365760" y="914400"/>
-            <a:ext cx="8412480" cy="1371600"/>
+            <a:off x="731520" y="868680"/>
+            <a:ext cx="10728655" cy="1371600"/>
           </a:xfrm>
-          <a:prstGeom prst="rect">
+          <a:prstGeom prst="roundRect">
             <a:avLst/>
           </a:prstGeom>
-          <a:noFill/>
+          <a:solidFill>
+            <a:srgbClr val="F8FAFC"/>
+          </a:solidFill>
+          <a:ln>
+            <a:solidFill>
+              <a:srgbClr val="CBD5E1"/>
+            </a:solidFill>
+          </a:ln>
         </p:spPr>
+        <p:style>
+          <a:lnRef idx="1">
+            <a:schemeClr val="accent1"/>
+          </a:lnRef>
+          <a:fillRef idx="3">
+            <a:schemeClr val="accent1"/>
+          </a:fillRef>
+          <a:effectRef idx="2">
+            <a:schemeClr val="accent1"/>
+          </a:effectRef>
+          <a:fontRef idx="minor">
+            <a:schemeClr val="lt1"/>
+          </a:fontRef>
+        </p:style>
         <p:txBody>
-          <a:bodyPr wrap="square">
-            <a:spAutoFit/>
-          </a:bodyPr>
+          <a:bodyPr rtlCol="0" anchor="ctr" wrap="square" lIns="228600" tIns="137160"/>
           <a:lstStyle/>
           <a:p>
-            <a:pPr algn="l">
-              <a:defRPr sz="1100" b="0"/>
+            <a:pPr algn="ctr">
+              <a:spcAft>
+                <a:spcPts val="400"/>
+              </a:spcAft>
+              <a:defRPr sz="1300" b="1">
+                <a:solidFill>
+                  <a:srgbClr val="1B365D"/>
+                </a:solidFill>
+                <a:latin typeface="Segoe UI"/>
+              </a:defRPr>
             </a:pPr>
             <a:r>
-              <a:t>Yield by Method:  Drip: 6.62  |  Flood: 4.9  |  Rainfed: 4.61  |  Sprinkler: 5.19 t/ha</a:t>
+              <a:t>IRRIGATION EFFICIENCY &amp; WATER PRODUCTIVITY (EXACT DATASET VALUES)</a:t>
+            </a:r>
+          </a:p>
+          <a:p>
+            <a:pPr>
+              <a:defRPr sz="1200" b="1">
+                <a:solidFill>
+                  <a:srgbClr val="1E293B"/>
+                </a:solidFill>
+                <a:latin typeface="Segoe UI"/>
+              </a:defRPr>
+            </a:pPr>
+            <a:r>
+              <a:t>• Yield by Irrigation (t/ha):  Drip: 6.58  |  Sprinkler: 5.16  |  Flood: 4.86  |  Rainfed: 4.60</a:t>
             </a:r>
             <a:br/>
+            <a:r>
+              <a:t>• Water Efficiency (t/1000m³):  Rainfed: 7.56  |  Drip: 6.27  |  Sprinkler: 4.67  |  Flood: 3.44</a:t>
+            </a:r>
             <a:br/>
             <a:r>
-              <a:t>Water Efficiency:  Drip: 6.27  |  Flood: 3.44  |  Rainfed: 7.56  |  Sprinkler: 4.67 t/1000m³</a:t>
-            </a:r>
-            <a:br/>
-            <a:br/>
-            <a:r>
-              <a:t>Water Usage:  Kharif: 6,102 m³  |  Rabi: 5,847 m³  |  Zaid: 6,420 m³</a:t>
+              <a:t>• Mean Seasonal Water Usage:  Kharif: 6,102 m³  |  Rabi: 5,847 m³  |  Zaid: 6,420 m³ (Highest water demand)</a:t>
             </a:r>
           </a:p>
         </p:txBody>
       </p:sp>
       <p:pic>
         <p:nvPicPr>
-          <p:cNvPr id="33" name="Picture 32" descr="10_irrigation_vs_yield.png"/>
+          <p:cNvPr id="33" name="Picture 32" descr="image.png"/>
           <p:cNvPicPr>
             <a:picLocks noChangeAspect="1"/>
           </p:cNvPicPr>
@@ -17613,8 +20156,8 @@
         </p:blipFill>
         <p:spPr>
           <a:xfrm>
-            <a:off x="731520" y="2468880"/>
-            <a:ext cx="5029200" cy="3104761"/>
+            <a:off x="731520" y="2423160"/>
+            <a:ext cx="5120640" cy="3154680"/>
           </a:xfrm>
           <a:prstGeom prst="rect">
             <a:avLst/>
@@ -17623,7 +20166,7 @@
       </p:pic>
       <p:pic>
         <p:nvPicPr>
-          <p:cNvPr id="34" name="Picture 33" descr="11_irrigation_vs_water_efficiency.png"/>
+          <p:cNvPr id="34" name="Picture 33" descr="image.png"/>
           <p:cNvPicPr>
             <a:picLocks noChangeAspect="1"/>
           </p:cNvPicPr>
@@ -17637,14 +20180,50 @@
         </p:blipFill>
         <p:spPr>
           <a:xfrm>
-            <a:off x="6217920" y="2468880"/>
-            <a:ext cx="5029200" cy="3104761"/>
+            <a:off x="6336792" y="2423160"/>
+            <a:ext cx="5120640" cy="3154680"/>
           </a:xfrm>
           <a:prstGeom prst="rect">
             <a:avLst/>
           </a:prstGeom>
         </p:spPr>
       </p:pic>
+      <p:sp>
+        <p:nvSpPr>
+          <p:cNvPr id="35" name="TextBox 34"/>
+          <p:cNvSpPr txBox="1"/>
+          <p:nvPr/>
+        </p:nvSpPr>
+        <p:spPr>
+          <a:xfrm>
+            <a:off x="731520" y="5715000"/>
+            <a:ext cx="10728655" cy="411480"/>
+          </a:xfrm>
+          <a:prstGeom prst="rect">
+            <a:avLst/>
+          </a:prstGeom>
+          <a:noFill/>
+        </p:spPr>
+        <p:txBody>
+          <a:bodyPr wrap="none">
+            <a:spAutoFit/>
+          </a:bodyPr>
+          <a:lstStyle/>
+          <a:p>
+            <a:pPr>
+              <a:defRPr sz="1100" b="1">
+                <a:solidFill>
+                  <a:srgbClr val="475569"/>
+                </a:solidFill>
+                <a:latin typeface="Segoe UI"/>
+              </a:defRPr>
+            </a:pPr>
+            <a:r>
+              <a:t>Key Insight: Drip irrigation yields 43% higher than rainfed (6.58 vs 4.60 t/ha). Flood irrigation is least efficient (3.44 t/1000m³) and should be transitioned to micro-irrigation.</a:t>
+            </a:r>
+          </a:p>
+        </p:txBody>
+      </p:sp>
     </p:spTree>
     <p:extLst>
       <p:ext uri="{BB962C8B-B14F-4D97-AF65-F5344CB8AC3E}">
